--- a/public/lessons/year-6-maths/summer/week-29/create-and-critique-solutions/teaching-powerpoint-v1.pptx
+++ b/public/lessons/year-6-maths/summer/week-29/create-and-critique-solutions/teaching-powerpoint-v1.pptx
@@ -2,24 +2,24 @@
 <file path=ppt/presentation.xml><?xml version="1.0" encoding="utf-8"?>
 <p:presentation xmlns:p="http://schemas.openxmlformats.org/presentationml/2006/main">
   <p:sldMasterIdLst>
-    <p:sldMasterId xmlns:r="http://schemas.openxmlformats.org/officeDocument/2006/relationships" id="2147483648" r:id="Rdc4abb59f89a46a9"/>
+    <p:sldMasterId xmlns:r="http://schemas.openxmlformats.org/officeDocument/2006/relationships" id="2147483648" r:id="Ra8fcc6b492244937"/>
   </p:sldMasterIdLst>
   <p:notesMasterIdLst>
-    <p:notesMasterId xmlns:r="http://schemas.openxmlformats.org/officeDocument/2006/relationships" r:id="Rb2990b8dc2e74b9f"/>
+    <p:notesMasterId xmlns:r="http://schemas.openxmlformats.org/officeDocument/2006/relationships" r:id="R8c07f1fa1f2e48c0"/>
   </p:notesMasterIdLst>
   <p:sldIdLst>
-    <p:sldId xmlns:r="http://schemas.openxmlformats.org/officeDocument/2006/relationships" id="256" r:id="R068f2c0cb0004fea"/>
-    <p:sldId xmlns:r="http://schemas.openxmlformats.org/officeDocument/2006/relationships" id="257" r:id="Rd6aa907d9d484f59"/>
-    <p:sldId xmlns:r="http://schemas.openxmlformats.org/officeDocument/2006/relationships" id="258" r:id="R35b1a0cc76e94702"/>
-    <p:sldId xmlns:r="http://schemas.openxmlformats.org/officeDocument/2006/relationships" id="259" r:id="R174b23010be44e13"/>
-    <p:sldId xmlns:r="http://schemas.openxmlformats.org/officeDocument/2006/relationships" id="260" r:id="R0304af6443d445b5"/>
-    <p:sldId xmlns:r="http://schemas.openxmlformats.org/officeDocument/2006/relationships" id="261" r:id="R24dbfd5799174a73"/>
-    <p:sldId xmlns:r="http://schemas.openxmlformats.org/officeDocument/2006/relationships" id="262" r:id="R5c65f7504efd4a71"/>
-    <p:sldId xmlns:r="http://schemas.openxmlformats.org/officeDocument/2006/relationships" id="263" r:id="R3e8ccb2868294283"/>
-    <p:sldId xmlns:r="http://schemas.openxmlformats.org/officeDocument/2006/relationships" id="264" r:id="R38d2ac42daa048fb"/>
-    <p:sldId xmlns:r="http://schemas.openxmlformats.org/officeDocument/2006/relationships" id="265" r:id="R9c3b118aac9b4bb2"/>
-    <p:sldId xmlns:r="http://schemas.openxmlformats.org/officeDocument/2006/relationships" id="266" r:id="R0932d0b66c314289"/>
-    <p:sldId xmlns:r="http://schemas.openxmlformats.org/officeDocument/2006/relationships" id="267" r:id="R5410cbd94b654ea2"/>
+    <p:sldId xmlns:r="http://schemas.openxmlformats.org/officeDocument/2006/relationships" id="256" r:id="Rf465b58f45264448"/>
+    <p:sldId xmlns:r="http://schemas.openxmlformats.org/officeDocument/2006/relationships" id="257" r:id="Re34a8706360f45fa"/>
+    <p:sldId xmlns:r="http://schemas.openxmlformats.org/officeDocument/2006/relationships" id="258" r:id="R8a92ab36f3ea449d"/>
+    <p:sldId xmlns:r="http://schemas.openxmlformats.org/officeDocument/2006/relationships" id="259" r:id="R0d30300334f1484c"/>
+    <p:sldId xmlns:r="http://schemas.openxmlformats.org/officeDocument/2006/relationships" id="260" r:id="R0c3ff1fed0c1419d"/>
+    <p:sldId xmlns:r="http://schemas.openxmlformats.org/officeDocument/2006/relationships" id="261" r:id="R31ac8b4c6d4c41c0"/>
+    <p:sldId xmlns:r="http://schemas.openxmlformats.org/officeDocument/2006/relationships" id="262" r:id="R8310ca4f54ab436c"/>
+    <p:sldId xmlns:r="http://schemas.openxmlformats.org/officeDocument/2006/relationships" id="263" r:id="Redde877dcb4040cb"/>
+    <p:sldId xmlns:r="http://schemas.openxmlformats.org/officeDocument/2006/relationships" id="264" r:id="Ra0ce01e0272c4275"/>
+    <p:sldId xmlns:r="http://schemas.openxmlformats.org/officeDocument/2006/relationships" id="265" r:id="Reff94741295b42c3"/>
+    <p:sldId xmlns:r="http://schemas.openxmlformats.org/officeDocument/2006/relationships" id="266" r:id="R193869e813b54d05"/>
+    <p:sldId xmlns:r="http://schemas.openxmlformats.org/officeDocument/2006/relationships" id="267" r:id="R49c943233a0b4b58"/>
   </p:sldIdLst>
   <p:sldSz cx="12192000" cy="6858000"/>
   <p:notesSz cx="6858000" cy="9144000"/>
@@ -733,7 +733,7 @@
           <a:lstStyle xmlns:a="http://schemas.openxmlformats.org/drawingml/2006/main"/>
           <a:p xmlns:a="http://schemas.openxmlformats.org/drawingml/2006/main">
             <a:r>
-              <a:t>Reveal each prompt on click. Use responses to identify pupils who need immediate rehearsal. Suggested responses: Pupil identifies a relevant fact, representation or method. | 244.8. | Identify the goal, constraints and useful information before calculating. | Represent the relationships first, label each subtotal and test the final answer against every condition.</a:t>
+              <a:t>Reveal each prompt on click. Use responses to identify pupils who need immediate rehearsal. Suggested responses: Pupil identifies a relevant fact, representation or method. | 220.8. | Identify the goal, constraints and useful information before calculating. | Represent the relationships first, label each subtotal and test the final answer against every condition.</a:t>
             </a:r>
           </a:p>
         </p:txBody>
@@ -873,7 +873,7 @@
           <a:lstStyle xmlns:a="http://schemas.openxmlformats.org/drawingml/2006/main"/>
           <a:p xmlns:a="http://schemas.openxmlformats.org/drawingml/2006/main">
             <a:r>
-              <a:t>I do. Reveal the question, setup and each calculation stage one click at a time. Pupils watch before copying. Model answer: Answers vary and must preserve the stated values and give 30.</a:t>
+              <a:t>I do. Reveal the question, then reveal each mathematical change one click at a time. Point to the numbers and operation that changed before moving to the next line. Final answer: Answers vary and must preserve the stated values and give 30.</a:t>
             </a:r>
           </a:p>
         </p:txBody>
@@ -1013,7 +1013,7 @@
           <a:lstStyle xmlns:a="http://schemas.openxmlformats.org/drawingml/2006/main"/>
           <a:p xmlns:a="http://schemas.openxmlformats.org/drawingml/2006/main">
             <a:r>
-              <a:t>We do. Give silent thinking time before paired talk. Take one step at a time. Do not reveal the answer until every pupil has committed. Answer: 244.8.</a:t>
+              <a:t>We do. Give silent thinking time before paired talk. Take one step at a time. Do not reveal the answer until every pupil has committed. Answer: 220.8.</a:t>
             </a:r>
           </a:p>
         </p:txBody>
@@ -1153,7 +1153,7 @@
           <a:lstStyle xmlns:a="http://schemas.openxmlformats.org/drawingml/2006/main"/>
           <a:p xmlns:a="http://schemas.openxmlformats.org/drawingml/2006/main">
             <a:r>
-              <a:t>Use whole-class response routines. Reveal each prompt separately. Expected answer: 244.8.. Insist on a reason, not only a numerical response.</a:t>
+              <a:t>Use whole-class response routines. Reveal each prompt separately. Expected answer: 220.8.. Insist on a reason, not only a numerical response.</a:t>
             </a:r>
           </a:p>
         </p:txBody>
@@ -1291,7 +1291,7 @@
   </p:cSld>
   <p:clrMap bg1="lt1" tx1="dk1" bg2="lt2" tx2="dk2" accent1="accent1" accent2="accent2" accent3="accent3" accent4="accent4" accent5="accent5" accent6="accent6" hlink="hlink" folHlink="folHlink"/>
   <p:sldLayoutIdLst>
-    <p:sldLayoutId xmlns:r="http://schemas.openxmlformats.org/officeDocument/2006/relationships" id="2147483649" r:id="R6fa7e17745b34958"/>
+    <p:sldLayoutId xmlns:r="http://schemas.openxmlformats.org/officeDocument/2006/relationships" id="2147483649" r:id="R6575042cc04c4d26"/>
   </p:sldLayoutIdLst>
   <p:txStyles>
     <p:titleStyle>
@@ -1842,7 +1842,7 @@
           <p:cNvPr id="12" name="">
             <a:extLst xmlns:a="http://schemas.openxmlformats.org/drawingml/2006/main">
               <a:ext uri="{FF2B5EF4-FFF2-40B4-BE49-F238E27FC236}">
-                <a16:creationId xmlns:a16="http://schemas.microsoft.com/office/drawing/2014/main" id="{42EDAF72-D902-47B9-87B2-F6D1DCB9E944}"/>
+                <a16:creationId xmlns:a16="http://schemas.microsoft.com/office/drawing/2014/main" id="{6825BE34-F456-4E5B-97BC-EDCD01DD2F38}"/>
               </a:ext>
             </a:extLst>
           </p:cNvPr>
@@ -1874,7 +1874,7 @@
           <p:cNvPr id="2" name="">
             <a:extLst xmlns:a="http://schemas.openxmlformats.org/drawingml/2006/main">
               <a:ext uri="{FF2B5EF4-FFF2-40B4-BE49-F238E27FC236}">
-                <a16:creationId xmlns:a16="http://schemas.microsoft.com/office/drawing/2014/main" id="{EAEEF485-B70B-49A9-8262-23E061F21C42}"/>
+                <a16:creationId xmlns:a16="http://schemas.microsoft.com/office/drawing/2014/main" id="{88590E42-5872-4D66-A444-77B90184F9F7}"/>
               </a:ext>
             </a:extLst>
           </p:cNvPr>
@@ -1931,7 +1931,7 @@
           <p:cNvPr id="3" name="">
             <a:extLst xmlns:a="http://schemas.openxmlformats.org/drawingml/2006/main">
               <a:ext uri="{FF2B5EF4-FFF2-40B4-BE49-F238E27FC236}">
-                <a16:creationId xmlns:a16="http://schemas.microsoft.com/office/drawing/2014/main" id="{DBDEE7DC-8579-4C6E-920B-0419EF6DC682}"/>
+                <a16:creationId xmlns:a16="http://schemas.microsoft.com/office/drawing/2014/main" id="{B480734E-45FA-45EB-B897-CF7971838898}"/>
               </a:ext>
             </a:extLst>
           </p:cNvPr>
@@ -1965,7 +1965,7 @@
           <p:cNvPr id="4" name="">
             <a:extLst xmlns:a="http://schemas.openxmlformats.org/drawingml/2006/main">
               <a:ext uri="{FF2B5EF4-FFF2-40B4-BE49-F238E27FC236}">
-                <a16:creationId xmlns:a16="http://schemas.microsoft.com/office/drawing/2014/main" id="{AD4A45F8-BF6B-41B9-8177-FD1B512EFF6D}"/>
+                <a16:creationId xmlns:a16="http://schemas.microsoft.com/office/drawing/2014/main" id="{5D5F2899-189A-417F-9D3F-7F882EBDBD51}"/>
               </a:ext>
             </a:extLst>
           </p:cNvPr>
@@ -2022,7 +2022,7 @@
           <p:cNvPr id="5" name="">
             <a:extLst xmlns:a="http://schemas.openxmlformats.org/drawingml/2006/main">
               <a:ext uri="{FF2B5EF4-FFF2-40B4-BE49-F238E27FC236}">
-                <a16:creationId xmlns:a16="http://schemas.microsoft.com/office/drawing/2014/main" id="{B7C70579-3CF8-47A1-80EE-F299CB8E2903}"/>
+                <a16:creationId xmlns:a16="http://schemas.microsoft.com/office/drawing/2014/main" id="{3222804D-F725-4923-BEBE-4624EA1959E0}"/>
               </a:ext>
             </a:extLst>
           </p:cNvPr>
@@ -2079,7 +2079,7 @@
           <p:cNvPr id="6" name="">
             <a:extLst xmlns:a="http://schemas.openxmlformats.org/drawingml/2006/main">
               <a:ext uri="{FF2B5EF4-FFF2-40B4-BE49-F238E27FC236}">
-                <a16:creationId xmlns:a16="http://schemas.microsoft.com/office/drawing/2014/main" id="{027CF4EB-AF13-4406-A5B8-76AB69D6844B}"/>
+                <a16:creationId xmlns:a16="http://schemas.microsoft.com/office/drawing/2014/main" id="{B852E4F8-3E25-4292-8942-26008D0BA187}"/>
               </a:ext>
             </a:extLst>
           </p:cNvPr>
@@ -2113,7 +2113,7 @@
           <p:cNvPr id="7" name="">
             <a:extLst xmlns:a="http://schemas.openxmlformats.org/drawingml/2006/main">
               <a:ext uri="{FF2B5EF4-FFF2-40B4-BE49-F238E27FC236}">
-                <a16:creationId xmlns:a16="http://schemas.microsoft.com/office/drawing/2014/main" id="{8BDC5DC5-42BF-42A0-A893-21B94057402B}"/>
+                <a16:creationId xmlns:a16="http://schemas.microsoft.com/office/drawing/2014/main" id="{3A3DA266-27A1-4F3A-84E9-C9F0625A070C}"/>
               </a:ext>
             </a:extLst>
           </p:cNvPr>
@@ -2170,7 +2170,7 @@
           <p:cNvPr id="8" name="">
             <a:extLst xmlns:a="http://schemas.openxmlformats.org/drawingml/2006/main">
               <a:ext uri="{FF2B5EF4-FFF2-40B4-BE49-F238E27FC236}">
-                <a16:creationId xmlns:a16="http://schemas.microsoft.com/office/drawing/2014/main" id="{BAF8FB1E-9055-4FED-98A7-BDBBFD3CA716}"/>
+                <a16:creationId xmlns:a16="http://schemas.microsoft.com/office/drawing/2014/main" id="{226A144D-E688-45CB-9D7D-322B7601E3AF}"/>
               </a:ext>
             </a:extLst>
           </p:cNvPr>
@@ -2227,7 +2227,7 @@
           <p:cNvPr id="9" name="">
             <a:extLst xmlns:a="http://schemas.openxmlformats.org/drawingml/2006/main">
               <a:ext uri="{FF2B5EF4-FFF2-40B4-BE49-F238E27FC236}">
-                <a16:creationId xmlns:a16="http://schemas.microsoft.com/office/drawing/2014/main" id="{DED92DE1-09C6-432B-BE15-761A6670CF55}"/>
+                <a16:creationId xmlns:a16="http://schemas.microsoft.com/office/drawing/2014/main" id="{386CCD2F-EA24-44E5-ACAD-B156560F9EC6}"/>
               </a:ext>
             </a:extLst>
           </p:cNvPr>
@@ -2284,7 +2284,7 @@
           <p:cNvPr id="10" name="">
             <a:extLst xmlns:a="http://schemas.openxmlformats.org/drawingml/2006/main">
               <a:ext uri="{FF2B5EF4-FFF2-40B4-BE49-F238E27FC236}">
-                <a16:creationId xmlns:a16="http://schemas.microsoft.com/office/drawing/2014/main" id="{A8B24224-33BE-4479-A165-81B8B631A5B2}"/>
+                <a16:creationId xmlns:a16="http://schemas.microsoft.com/office/drawing/2014/main" id="{64831B56-BB63-4B9D-91BA-86781D6D7F91}"/>
               </a:ext>
             </a:extLst>
           </p:cNvPr>
@@ -2341,7 +2341,7 @@
           <p:cNvPr id="11" name="">
             <a:extLst xmlns:a="http://schemas.openxmlformats.org/drawingml/2006/main">
               <a:ext uri="{FF2B5EF4-FFF2-40B4-BE49-F238E27FC236}">
-                <a16:creationId xmlns:a16="http://schemas.microsoft.com/office/drawing/2014/main" id="{3D340A87-0922-404D-8E4A-40F496876C11}"/>
+                <a16:creationId xmlns:a16="http://schemas.microsoft.com/office/drawing/2014/main" id="{2AC63154-71E0-4703-8D0F-3A48B465AFB2}"/>
               </a:ext>
             </a:extLst>
           </p:cNvPr>
@@ -2396,7 +2396,7 @@
     </p:spTree>
     <p:extLst>
       <p:ext uri="{BB962C8B-B14F-4D97-AF65-F5344CB8AC3E}">
-        <p14:creationId xmlns:p14="http://schemas.microsoft.com/office/powerpoint/2010/main" val="1484987255"/>
+        <p14:creationId xmlns:p14="http://schemas.microsoft.com/office/powerpoint/2010/main" val="548868819"/>
       </p:ext>
     </p:extLst>
   </p:cSld>
@@ -2427,7 +2427,7 @@
           <p:cNvPr id="14" name="">
             <a:extLst xmlns:a="http://schemas.openxmlformats.org/drawingml/2006/main">
               <a:ext uri="{FF2B5EF4-FFF2-40B4-BE49-F238E27FC236}">
-                <a16:creationId xmlns:a16="http://schemas.microsoft.com/office/drawing/2014/main" id="{63903B4F-4557-4E28-A1AD-998EC57F704C}"/>
+                <a16:creationId xmlns:a16="http://schemas.microsoft.com/office/drawing/2014/main" id="{04FEAFA1-FF72-4374-BB4D-9E8265E8819B}"/>
               </a:ext>
             </a:extLst>
           </p:cNvPr>
@@ -2459,7 +2459,7 @@
           <p:cNvPr id="2" name="">
             <a:extLst xmlns:a="http://schemas.openxmlformats.org/drawingml/2006/main">
               <a:ext uri="{FF2B5EF4-FFF2-40B4-BE49-F238E27FC236}">
-                <a16:creationId xmlns:a16="http://schemas.microsoft.com/office/drawing/2014/main" id="{05D40827-3C88-4FE2-8909-2E5F52F79A14}"/>
+                <a16:creationId xmlns:a16="http://schemas.microsoft.com/office/drawing/2014/main" id="{E740EF09-ECE5-4044-9C23-17C8B6DCA161}"/>
               </a:ext>
             </a:extLst>
           </p:cNvPr>
@@ -2516,7 +2516,7 @@
           <p:cNvPr id="3" name="">
             <a:extLst xmlns:a="http://schemas.openxmlformats.org/drawingml/2006/main">
               <a:ext uri="{FF2B5EF4-FFF2-40B4-BE49-F238E27FC236}">
-                <a16:creationId xmlns:a16="http://schemas.microsoft.com/office/drawing/2014/main" id="{9F017D40-48A5-4A00-9810-A1313EC9038F}"/>
+                <a16:creationId xmlns:a16="http://schemas.microsoft.com/office/drawing/2014/main" id="{5B437D14-B88F-4098-87BB-4BA1F4D2B901}"/>
               </a:ext>
             </a:extLst>
           </p:cNvPr>
@@ -2548,7 +2548,7 @@
           <p:cNvPr id="4" name="">
             <a:extLst xmlns:a="http://schemas.openxmlformats.org/drawingml/2006/main">
               <a:ext uri="{FF2B5EF4-FFF2-40B4-BE49-F238E27FC236}">
-                <a16:creationId xmlns:a16="http://schemas.microsoft.com/office/drawing/2014/main" id="{435DBC37-82C4-4F45-BD3E-7E628646C1DA}"/>
+                <a16:creationId xmlns:a16="http://schemas.microsoft.com/office/drawing/2014/main" id="{375E5979-54DA-4E8B-BF80-990D36505AAA}"/>
               </a:ext>
             </a:extLst>
           </p:cNvPr>
@@ -2605,7 +2605,7 @@
           <p:cNvPr id="5" name="">
             <a:extLst xmlns:a="http://schemas.openxmlformats.org/drawingml/2006/main">
               <a:ext uri="{FF2B5EF4-FFF2-40B4-BE49-F238E27FC236}">
-                <a16:creationId xmlns:a16="http://schemas.microsoft.com/office/drawing/2014/main" id="{72F64A77-C2C9-430A-8212-DF0EBC4080C1}"/>
+                <a16:creationId xmlns:a16="http://schemas.microsoft.com/office/drawing/2014/main" id="{2C6B4427-2E59-44F3-97A9-A62929752DE0}"/>
               </a:ext>
             </a:extLst>
           </p:cNvPr>
@@ -2662,7 +2662,7 @@
           <p:cNvPr id="6" name="">
             <a:extLst xmlns:a="http://schemas.openxmlformats.org/drawingml/2006/main">
               <a:ext uri="{FF2B5EF4-FFF2-40B4-BE49-F238E27FC236}">
-                <a16:creationId xmlns:a16="http://schemas.microsoft.com/office/drawing/2014/main" id="{635787F3-8D6D-46A7-B7B5-C1B87D6998DB}"/>
+                <a16:creationId xmlns:a16="http://schemas.microsoft.com/office/drawing/2014/main" id="{19505201-606F-445D-94E0-B2C3DB9D1556}"/>
               </a:ext>
             </a:extLst>
           </p:cNvPr>
@@ -2719,7 +2719,7 @@
           <p:cNvPr id="7" name="">
             <a:extLst xmlns:a="http://schemas.openxmlformats.org/drawingml/2006/main">
               <a:ext uri="{FF2B5EF4-FFF2-40B4-BE49-F238E27FC236}">
-                <a16:creationId xmlns:a16="http://schemas.microsoft.com/office/drawing/2014/main" id="{161F4FCA-4179-4B71-BEC5-A20FDFEBEE48}"/>
+                <a16:creationId xmlns:a16="http://schemas.microsoft.com/office/drawing/2014/main" id="{9D2EF9D0-B208-49BD-9BBA-B7A2D58E656A}"/>
               </a:ext>
             </a:extLst>
           </p:cNvPr>
@@ -2751,7 +2751,7 @@
           <p:cNvPr id="8" name="">
             <a:extLst xmlns:a="http://schemas.openxmlformats.org/drawingml/2006/main">
               <a:ext uri="{FF2B5EF4-FFF2-40B4-BE49-F238E27FC236}">
-                <a16:creationId xmlns:a16="http://schemas.microsoft.com/office/drawing/2014/main" id="{F8AEFBCA-5353-4D22-A5E9-9330BF8584BB}"/>
+                <a16:creationId xmlns:a16="http://schemas.microsoft.com/office/drawing/2014/main" id="{46135296-EC86-4381-A3DF-6F396B233C33}"/>
               </a:ext>
             </a:extLst>
           </p:cNvPr>
@@ -2808,7 +2808,7 @@
           <p:cNvPr id="9" name="">
             <a:extLst xmlns:a="http://schemas.openxmlformats.org/drawingml/2006/main">
               <a:ext uri="{FF2B5EF4-FFF2-40B4-BE49-F238E27FC236}">
-                <a16:creationId xmlns:a16="http://schemas.microsoft.com/office/drawing/2014/main" id="{21292808-F9CF-49BF-982B-A0C2D8BAF38D}"/>
+                <a16:creationId xmlns:a16="http://schemas.microsoft.com/office/drawing/2014/main" id="{43E8C697-8485-4273-8D86-49646A01BFAA}"/>
               </a:ext>
             </a:extLst>
           </p:cNvPr>
@@ -2865,7 +2865,7 @@
           <p:cNvPr id="10" name="">
             <a:extLst xmlns:a="http://schemas.openxmlformats.org/drawingml/2006/main">
               <a:ext uri="{FF2B5EF4-FFF2-40B4-BE49-F238E27FC236}">
-                <a16:creationId xmlns:a16="http://schemas.microsoft.com/office/drawing/2014/main" id="{E7A2CAF9-C208-45E8-A65B-5F2A50ECF881}"/>
+                <a16:creationId xmlns:a16="http://schemas.microsoft.com/office/drawing/2014/main" id="{96647995-C5BE-41B0-94D2-7D0A3F17E8E9}"/>
               </a:ext>
             </a:extLst>
           </p:cNvPr>
@@ -2922,7 +2922,7 @@
           <p:cNvPr id="11" name="">
             <a:extLst xmlns:a="http://schemas.openxmlformats.org/drawingml/2006/main">
               <a:ext uri="{FF2B5EF4-FFF2-40B4-BE49-F238E27FC236}">
-                <a16:creationId xmlns:a16="http://schemas.microsoft.com/office/drawing/2014/main" id="{86009278-871C-48AC-BD16-3E1033D3053A}"/>
+                <a16:creationId xmlns:a16="http://schemas.microsoft.com/office/drawing/2014/main" id="{5A8E9A0E-2FC4-45B4-B76F-1B59D5FD3FBB}"/>
               </a:ext>
             </a:extLst>
           </p:cNvPr>
@@ -2979,7 +2979,7 @@
           <p:cNvPr id="12" name="">
             <a:extLst xmlns:a="http://schemas.openxmlformats.org/drawingml/2006/main">
               <a:ext uri="{FF2B5EF4-FFF2-40B4-BE49-F238E27FC236}">
-                <a16:creationId xmlns:a16="http://schemas.microsoft.com/office/drawing/2014/main" id="{DF7AA5CF-5DEB-424F-BD83-23E5E006AF4A}"/>
+                <a16:creationId xmlns:a16="http://schemas.microsoft.com/office/drawing/2014/main" id="{C632426B-89F7-40A9-BF14-22A077778996}"/>
               </a:ext>
             </a:extLst>
           </p:cNvPr>
@@ -3036,7 +3036,7 @@
           <p:cNvPr id="13" name="">
             <a:extLst xmlns:a="http://schemas.openxmlformats.org/drawingml/2006/main">
               <a:ext uri="{FF2B5EF4-FFF2-40B4-BE49-F238E27FC236}">
-                <a16:creationId xmlns:a16="http://schemas.microsoft.com/office/drawing/2014/main" id="{211715E6-23C7-472B-A8A0-3FF5462D91C1}"/>
+                <a16:creationId xmlns:a16="http://schemas.microsoft.com/office/drawing/2014/main" id="{66E1352F-83AF-4934-A78A-ED9A2BC67A1B}"/>
               </a:ext>
             </a:extLst>
           </p:cNvPr>
@@ -3091,7 +3091,7 @@
     </p:spTree>
     <p:extLst>
       <p:ext uri="{BB962C8B-B14F-4D97-AF65-F5344CB8AC3E}">
-        <p14:creationId xmlns:p14="http://schemas.microsoft.com/office/powerpoint/2010/main" val="341422152"/>
+        <p14:creationId xmlns:p14="http://schemas.microsoft.com/office/powerpoint/2010/main" val="2092411940"/>
       </p:ext>
     </p:extLst>
   </p:cSld>
@@ -3292,7 +3292,7 @@
           <p:cNvPr id="19" name="">
             <a:extLst xmlns:a="http://schemas.openxmlformats.org/drawingml/2006/main">
               <a:ext uri="{FF2B5EF4-FFF2-40B4-BE49-F238E27FC236}">
-                <a16:creationId xmlns:a16="http://schemas.microsoft.com/office/drawing/2014/main" id="{0289B492-6E6D-4F39-A9C9-8AC9A8E586E2}"/>
+                <a16:creationId xmlns:a16="http://schemas.microsoft.com/office/drawing/2014/main" id="{AF768718-D663-4B93-A46B-5A097AE38EAF}"/>
               </a:ext>
             </a:extLst>
           </p:cNvPr>
@@ -3324,7 +3324,7 @@
           <p:cNvPr id="2" name="">
             <a:extLst xmlns:a="http://schemas.openxmlformats.org/drawingml/2006/main">
               <a:ext uri="{FF2B5EF4-FFF2-40B4-BE49-F238E27FC236}">
-                <a16:creationId xmlns:a16="http://schemas.microsoft.com/office/drawing/2014/main" id="{BA52CE20-8C75-4B10-8D05-742AF4D23C13}"/>
+                <a16:creationId xmlns:a16="http://schemas.microsoft.com/office/drawing/2014/main" id="{FA87339A-6508-4DA9-8FEF-3962A27E36FE}"/>
               </a:ext>
             </a:extLst>
           </p:cNvPr>
@@ -3381,7 +3381,7 @@
           <p:cNvPr id="3" name="">
             <a:extLst xmlns:a="http://schemas.openxmlformats.org/drawingml/2006/main">
               <a:ext uri="{FF2B5EF4-FFF2-40B4-BE49-F238E27FC236}">
-                <a16:creationId xmlns:a16="http://schemas.microsoft.com/office/drawing/2014/main" id="{2336C154-1C8D-4466-A15D-644C095421E7}"/>
+                <a16:creationId xmlns:a16="http://schemas.microsoft.com/office/drawing/2014/main" id="{5F5D779E-205A-4D6E-BF73-C22FF66C490A}"/>
               </a:ext>
             </a:extLst>
           </p:cNvPr>
@@ -3413,7 +3413,7 @@
           <p:cNvPr id="4" name="">
             <a:extLst xmlns:a="http://schemas.openxmlformats.org/drawingml/2006/main">
               <a:ext uri="{FF2B5EF4-FFF2-40B4-BE49-F238E27FC236}">
-                <a16:creationId xmlns:a16="http://schemas.microsoft.com/office/drawing/2014/main" id="{CD1A9328-9E92-4902-AAFB-496848E5D0C4}"/>
+                <a16:creationId xmlns:a16="http://schemas.microsoft.com/office/drawing/2014/main" id="{CA3266AE-CD91-4063-9C39-6C757E775809}"/>
               </a:ext>
             </a:extLst>
           </p:cNvPr>
@@ -3470,7 +3470,7 @@
           <p:cNvPr id="5" name="">
             <a:extLst xmlns:a="http://schemas.openxmlformats.org/drawingml/2006/main">
               <a:ext uri="{FF2B5EF4-FFF2-40B4-BE49-F238E27FC236}">
-                <a16:creationId xmlns:a16="http://schemas.microsoft.com/office/drawing/2014/main" id="{5FA2FD6D-D763-43B3-AB12-19E251841D2E}"/>
+                <a16:creationId xmlns:a16="http://schemas.microsoft.com/office/drawing/2014/main" id="{F0107E29-8524-4C9F-BF53-AD6D8BA525AF}"/>
               </a:ext>
             </a:extLst>
           </p:cNvPr>
@@ -3527,7 +3527,7 @@
           <p:cNvPr id="6" name="">
             <a:extLst xmlns:a="http://schemas.openxmlformats.org/drawingml/2006/main">
               <a:ext uri="{FF2B5EF4-FFF2-40B4-BE49-F238E27FC236}">
-                <a16:creationId xmlns:a16="http://schemas.microsoft.com/office/drawing/2014/main" id="{EC271F7A-1A0C-4275-917C-DEF7F96E5EEB}"/>
+                <a16:creationId xmlns:a16="http://schemas.microsoft.com/office/drawing/2014/main" id="{FB7A361D-D242-4CC0-8AA4-EBA58180827B}"/>
               </a:ext>
             </a:extLst>
           </p:cNvPr>
@@ -3584,7 +3584,7 @@
           <p:cNvPr id="7" name="">
             <a:extLst xmlns:a="http://schemas.openxmlformats.org/drawingml/2006/main">
               <a:ext uri="{FF2B5EF4-FFF2-40B4-BE49-F238E27FC236}">
-                <a16:creationId xmlns:a16="http://schemas.microsoft.com/office/drawing/2014/main" id="{CE6656DB-0EFE-433C-8741-4C1BE38CEE0C}"/>
+                <a16:creationId xmlns:a16="http://schemas.microsoft.com/office/drawing/2014/main" id="{3036E982-B7D6-4CA6-ABA4-0F6D45A5678E}"/>
               </a:ext>
             </a:extLst>
           </p:cNvPr>
@@ -3616,7 +3616,7 @@
           <p:cNvPr id="8" name="">
             <a:extLst xmlns:a="http://schemas.openxmlformats.org/drawingml/2006/main">
               <a:ext uri="{FF2B5EF4-FFF2-40B4-BE49-F238E27FC236}">
-                <a16:creationId xmlns:a16="http://schemas.microsoft.com/office/drawing/2014/main" id="{164956A6-7068-4B6A-99B8-667054B4D8C1}"/>
+                <a16:creationId xmlns:a16="http://schemas.microsoft.com/office/drawing/2014/main" id="{3C69E2F0-A0BB-4A1B-A47A-041A72897604}"/>
               </a:ext>
             </a:extLst>
           </p:cNvPr>
@@ -3673,7 +3673,7 @@
           <p:cNvPr id="9" name="">
             <a:extLst xmlns:a="http://schemas.openxmlformats.org/drawingml/2006/main">
               <a:ext uri="{FF2B5EF4-FFF2-40B4-BE49-F238E27FC236}">
-                <a16:creationId xmlns:a16="http://schemas.microsoft.com/office/drawing/2014/main" id="{49EA7F3A-113F-4076-922B-2843F96BF948}"/>
+                <a16:creationId xmlns:a16="http://schemas.microsoft.com/office/drawing/2014/main" id="{4DCA9582-24BA-43DA-9BCD-B06630F92D17}"/>
               </a:ext>
             </a:extLst>
           </p:cNvPr>
@@ -3730,7 +3730,7 @@
           <p:cNvPr id="10" name="">
             <a:extLst xmlns:a="http://schemas.openxmlformats.org/drawingml/2006/main">
               <a:ext uri="{FF2B5EF4-FFF2-40B4-BE49-F238E27FC236}">
-                <a16:creationId xmlns:a16="http://schemas.microsoft.com/office/drawing/2014/main" id="{1AFE7D05-A20F-4D3D-9286-4F4918068C54}"/>
+                <a16:creationId xmlns:a16="http://schemas.microsoft.com/office/drawing/2014/main" id="{876257BD-79B3-4513-8785-E060BEE03D90}"/>
               </a:ext>
             </a:extLst>
           </p:cNvPr>
@@ -3787,7 +3787,7 @@
           <p:cNvPr id="11" name="">
             <a:extLst xmlns:a="http://schemas.openxmlformats.org/drawingml/2006/main">
               <a:ext uri="{FF2B5EF4-FFF2-40B4-BE49-F238E27FC236}">
-                <a16:creationId xmlns:a16="http://schemas.microsoft.com/office/drawing/2014/main" id="{D5821F7E-6CD2-4F76-832F-75F72A7E6793}"/>
+                <a16:creationId xmlns:a16="http://schemas.microsoft.com/office/drawing/2014/main" id="{C836B000-43AA-4FF9-8CD3-ACBEB7444BFA}"/>
               </a:ext>
             </a:extLst>
           </p:cNvPr>
@@ -3821,7 +3821,7 @@
           <p:cNvPr id="12" name="">
             <a:extLst xmlns:a="http://schemas.openxmlformats.org/drawingml/2006/main">
               <a:ext uri="{FF2B5EF4-FFF2-40B4-BE49-F238E27FC236}">
-                <a16:creationId xmlns:a16="http://schemas.microsoft.com/office/drawing/2014/main" id="{719CC34F-F45A-4004-BFF3-76FF7092BBDC}"/>
+                <a16:creationId xmlns:a16="http://schemas.microsoft.com/office/drawing/2014/main" id="{3B245BE2-0485-4B9E-9082-6129F3CAB23F}"/>
               </a:ext>
             </a:extLst>
           </p:cNvPr>
@@ -3878,7 +3878,7 @@
           <p:cNvPr id="13" name="">
             <a:extLst xmlns:a="http://schemas.openxmlformats.org/drawingml/2006/main">
               <a:ext uri="{FF2B5EF4-FFF2-40B4-BE49-F238E27FC236}">
-                <a16:creationId xmlns:a16="http://schemas.microsoft.com/office/drawing/2014/main" id="{99578323-E961-4EBE-9012-A170C955CDC1}"/>
+                <a16:creationId xmlns:a16="http://schemas.microsoft.com/office/drawing/2014/main" id="{84D2ACF3-6E96-4269-9D0E-871539FAC001}"/>
               </a:ext>
             </a:extLst>
           </p:cNvPr>
@@ -3935,7 +3935,7 @@
           <p:cNvPr id="14" name="">
             <a:extLst xmlns:a="http://schemas.openxmlformats.org/drawingml/2006/main">
               <a:ext uri="{FF2B5EF4-FFF2-40B4-BE49-F238E27FC236}">
-                <a16:creationId xmlns:a16="http://schemas.microsoft.com/office/drawing/2014/main" id="{3A0BC16B-5D91-47CE-B18E-C3DAF7E6B297}"/>
+                <a16:creationId xmlns:a16="http://schemas.microsoft.com/office/drawing/2014/main" id="{959077D7-CEC0-4999-86B9-144A90A2DB36}"/>
               </a:ext>
             </a:extLst>
           </p:cNvPr>
@@ -3992,7 +3992,7 @@
           <p:cNvPr id="15" name="">
             <a:extLst xmlns:a="http://schemas.openxmlformats.org/drawingml/2006/main">
               <a:ext uri="{FF2B5EF4-FFF2-40B4-BE49-F238E27FC236}">
-                <a16:creationId xmlns:a16="http://schemas.microsoft.com/office/drawing/2014/main" id="{FB87E423-043D-4D03-9E9E-489E6AEE764F}"/>
+                <a16:creationId xmlns:a16="http://schemas.microsoft.com/office/drawing/2014/main" id="{74EF8C8E-4B6B-4912-84A3-17D05A30565F}"/>
               </a:ext>
             </a:extLst>
           </p:cNvPr>
@@ -4026,7 +4026,7 @@
           <p:cNvPr id="16" name="">
             <a:extLst xmlns:a="http://schemas.openxmlformats.org/drawingml/2006/main">
               <a:ext uri="{FF2B5EF4-FFF2-40B4-BE49-F238E27FC236}">
-                <a16:creationId xmlns:a16="http://schemas.microsoft.com/office/drawing/2014/main" id="{2EB9611C-96BE-4A4C-A416-FBBA04383CD6}"/>
+                <a16:creationId xmlns:a16="http://schemas.microsoft.com/office/drawing/2014/main" id="{7A65D41E-CFAA-4D11-9A20-209D9EB182B1}"/>
               </a:ext>
             </a:extLst>
           </p:cNvPr>
@@ -4083,7 +4083,7 @@
           <p:cNvPr id="17" name="">
             <a:extLst xmlns:a="http://schemas.openxmlformats.org/drawingml/2006/main">
               <a:ext uri="{FF2B5EF4-FFF2-40B4-BE49-F238E27FC236}">
-                <a16:creationId xmlns:a16="http://schemas.microsoft.com/office/drawing/2014/main" id="{1F8BF1C3-3C82-49CA-A5EE-B4C10EC53537}"/>
+                <a16:creationId xmlns:a16="http://schemas.microsoft.com/office/drawing/2014/main" id="{D85E35C2-1DC1-4BB6-9255-79FAA5FCF1BB}"/>
               </a:ext>
             </a:extLst>
           </p:cNvPr>
@@ -4140,7 +4140,7 @@
           <p:cNvPr id="18" name="">
             <a:extLst xmlns:a="http://schemas.openxmlformats.org/drawingml/2006/main">
               <a:ext uri="{FF2B5EF4-FFF2-40B4-BE49-F238E27FC236}">
-                <a16:creationId xmlns:a16="http://schemas.microsoft.com/office/drawing/2014/main" id="{49BB9311-A1F4-487E-A848-2A7F9EBBB3AE}"/>
+                <a16:creationId xmlns:a16="http://schemas.microsoft.com/office/drawing/2014/main" id="{79B3F64E-8A9D-44AE-9CB6-8C3EC46013AD}"/>
               </a:ext>
             </a:extLst>
           </p:cNvPr>
@@ -4195,7 +4195,7 @@
     </p:spTree>
     <p:extLst>
       <p:ext uri="{BB962C8B-B14F-4D97-AF65-F5344CB8AC3E}">
-        <p14:creationId xmlns:p14="http://schemas.microsoft.com/office/powerpoint/2010/main" val="485696984"/>
+        <p14:creationId xmlns:p14="http://schemas.microsoft.com/office/powerpoint/2010/main" val="766780568"/>
       </p:ext>
     </p:extLst>
   </p:cSld>
@@ -4350,7 +4350,7 @@
           <p:cNvPr id="23" name="">
             <a:extLst xmlns:a="http://schemas.openxmlformats.org/drawingml/2006/main">
               <a:ext uri="{FF2B5EF4-FFF2-40B4-BE49-F238E27FC236}">
-                <a16:creationId xmlns:a16="http://schemas.microsoft.com/office/drawing/2014/main" id="{90E38BAE-3760-4F77-B849-3D7581CE81FD}"/>
+                <a16:creationId xmlns:a16="http://schemas.microsoft.com/office/drawing/2014/main" id="{5FC56C1C-B982-4725-B6C1-D11A7F38C7A1}"/>
               </a:ext>
             </a:extLst>
           </p:cNvPr>
@@ -4382,7 +4382,7 @@
           <p:cNvPr id="2" name="">
             <a:extLst xmlns:a="http://schemas.openxmlformats.org/drawingml/2006/main">
               <a:ext uri="{FF2B5EF4-FFF2-40B4-BE49-F238E27FC236}">
-                <a16:creationId xmlns:a16="http://schemas.microsoft.com/office/drawing/2014/main" id="{9C85CF79-2BA8-4F18-9C6E-8C731CFFCDAA}"/>
+                <a16:creationId xmlns:a16="http://schemas.microsoft.com/office/drawing/2014/main" id="{1B395117-94AD-4E28-AAFB-D8A0930DE2C4}"/>
               </a:ext>
             </a:extLst>
           </p:cNvPr>
@@ -4439,7 +4439,7 @@
           <p:cNvPr id="3" name="">
             <a:extLst xmlns:a="http://schemas.openxmlformats.org/drawingml/2006/main">
               <a:ext uri="{FF2B5EF4-FFF2-40B4-BE49-F238E27FC236}">
-                <a16:creationId xmlns:a16="http://schemas.microsoft.com/office/drawing/2014/main" id="{3A65E9C8-5A94-4082-A974-9A47F01763C5}"/>
+                <a16:creationId xmlns:a16="http://schemas.microsoft.com/office/drawing/2014/main" id="{17DDF479-0203-46E3-B0B2-FD67439D13D6}"/>
               </a:ext>
             </a:extLst>
           </p:cNvPr>
@@ -4471,7 +4471,7 @@
           <p:cNvPr id="4" name="">
             <a:extLst xmlns:a="http://schemas.openxmlformats.org/drawingml/2006/main">
               <a:ext uri="{FF2B5EF4-FFF2-40B4-BE49-F238E27FC236}">
-                <a16:creationId xmlns:a16="http://schemas.microsoft.com/office/drawing/2014/main" id="{86FBD156-E669-4AF9-9CC0-8F357F472713}"/>
+                <a16:creationId xmlns:a16="http://schemas.microsoft.com/office/drawing/2014/main" id="{5CFF5845-69AC-490F-9B3F-B9C79DDE3F47}"/>
               </a:ext>
             </a:extLst>
           </p:cNvPr>
@@ -4528,7 +4528,7 @@
           <p:cNvPr id="5" name="">
             <a:extLst xmlns:a="http://schemas.openxmlformats.org/drawingml/2006/main">
               <a:ext uri="{FF2B5EF4-FFF2-40B4-BE49-F238E27FC236}">
-                <a16:creationId xmlns:a16="http://schemas.microsoft.com/office/drawing/2014/main" id="{77F4A0CD-DBB3-48AF-92B6-EBD7C1FA6231}"/>
+                <a16:creationId xmlns:a16="http://schemas.microsoft.com/office/drawing/2014/main" id="{3D2748EC-F73E-45C2-A0F8-D484B993D89E}"/>
               </a:ext>
             </a:extLst>
           </p:cNvPr>
@@ -4585,7 +4585,7 @@
           <p:cNvPr id="6" name="">
             <a:extLst xmlns:a="http://schemas.openxmlformats.org/drawingml/2006/main">
               <a:ext uri="{FF2B5EF4-FFF2-40B4-BE49-F238E27FC236}">
-                <a16:creationId xmlns:a16="http://schemas.microsoft.com/office/drawing/2014/main" id="{D10D85E9-1157-436F-84BA-DD39745B7CB5}"/>
+                <a16:creationId xmlns:a16="http://schemas.microsoft.com/office/drawing/2014/main" id="{0488C2E2-C830-46DE-A5A4-B587A4799ED7}"/>
               </a:ext>
             </a:extLst>
           </p:cNvPr>
@@ -4642,7 +4642,7 @@
           <p:cNvPr id="7" name="">
             <a:extLst xmlns:a="http://schemas.openxmlformats.org/drawingml/2006/main">
               <a:ext uri="{FF2B5EF4-FFF2-40B4-BE49-F238E27FC236}">
-                <a16:creationId xmlns:a16="http://schemas.microsoft.com/office/drawing/2014/main" id="{A1976B56-D09D-420A-BF30-B86D020A3DB4}"/>
+                <a16:creationId xmlns:a16="http://schemas.microsoft.com/office/drawing/2014/main" id="{92502F50-6E19-4C2A-8B62-A57E316DDF8A}"/>
               </a:ext>
             </a:extLst>
           </p:cNvPr>
@@ -4674,7 +4674,7 @@
           <p:cNvPr id="8" name="">
             <a:extLst xmlns:a="http://schemas.openxmlformats.org/drawingml/2006/main">
               <a:ext uri="{FF2B5EF4-FFF2-40B4-BE49-F238E27FC236}">
-                <a16:creationId xmlns:a16="http://schemas.microsoft.com/office/drawing/2014/main" id="{8286BB29-F7BC-45A0-8D30-E59E3476EC3B}"/>
+                <a16:creationId xmlns:a16="http://schemas.microsoft.com/office/drawing/2014/main" id="{88F076A7-3F54-4F60-86DE-A5C3C20CE36A}"/>
               </a:ext>
             </a:extLst>
           </p:cNvPr>
@@ -4731,7 +4731,7 @@
           <p:cNvPr id="9" name="">
             <a:extLst xmlns:a="http://schemas.openxmlformats.org/drawingml/2006/main">
               <a:ext uri="{FF2B5EF4-FFF2-40B4-BE49-F238E27FC236}">
-                <a16:creationId xmlns:a16="http://schemas.microsoft.com/office/drawing/2014/main" id="{FB43872A-D435-4B23-9F1F-4E79B81BBFE4}"/>
+                <a16:creationId xmlns:a16="http://schemas.microsoft.com/office/drawing/2014/main" id="{C800D19C-6C37-42FB-82AF-A3DAF053F13C}"/>
               </a:ext>
             </a:extLst>
           </p:cNvPr>
@@ -4788,7 +4788,7 @@
           <p:cNvPr id="10" name="">
             <a:extLst xmlns:a="http://schemas.openxmlformats.org/drawingml/2006/main">
               <a:ext uri="{FF2B5EF4-FFF2-40B4-BE49-F238E27FC236}">
-                <a16:creationId xmlns:a16="http://schemas.microsoft.com/office/drawing/2014/main" id="{8908FB16-141B-4834-94F2-7BB622667739}"/>
+                <a16:creationId xmlns:a16="http://schemas.microsoft.com/office/drawing/2014/main" id="{C5DCF421-E784-4D6A-8A4B-C4995658AA76}"/>
               </a:ext>
             </a:extLst>
           </p:cNvPr>
@@ -4822,7 +4822,7 @@
           <p:cNvPr id="11" name="">
             <a:extLst xmlns:a="http://schemas.openxmlformats.org/drawingml/2006/main">
               <a:ext uri="{FF2B5EF4-FFF2-40B4-BE49-F238E27FC236}">
-                <a16:creationId xmlns:a16="http://schemas.microsoft.com/office/drawing/2014/main" id="{8AFF5A20-6826-4CD0-A50E-CBDF3DB87574}"/>
+                <a16:creationId xmlns:a16="http://schemas.microsoft.com/office/drawing/2014/main" id="{FBF46771-F477-4C6F-9B71-77B472DB4DC2}"/>
               </a:ext>
             </a:extLst>
           </p:cNvPr>
@@ -4854,7 +4854,7 @@
           <p:cNvPr id="12" name="">
             <a:extLst xmlns:a="http://schemas.openxmlformats.org/drawingml/2006/main">
               <a:ext uri="{FF2B5EF4-FFF2-40B4-BE49-F238E27FC236}">
-                <a16:creationId xmlns:a16="http://schemas.microsoft.com/office/drawing/2014/main" id="{4683560B-C88A-484F-8AFD-EC9C7517573D}"/>
+                <a16:creationId xmlns:a16="http://schemas.microsoft.com/office/drawing/2014/main" id="{4EDACE0C-C4EE-44BD-BD88-207A2373EDB9}"/>
               </a:ext>
             </a:extLst>
           </p:cNvPr>
@@ -4911,7 +4911,7 @@
           <p:cNvPr id="13" name="">
             <a:extLst xmlns:a="http://schemas.openxmlformats.org/drawingml/2006/main">
               <a:ext uri="{FF2B5EF4-FFF2-40B4-BE49-F238E27FC236}">
-                <a16:creationId xmlns:a16="http://schemas.microsoft.com/office/drawing/2014/main" id="{6A133487-C6DA-4E6E-BC1F-0ED8B528D1B9}"/>
+                <a16:creationId xmlns:a16="http://schemas.microsoft.com/office/drawing/2014/main" id="{2C96322F-DF3C-4640-BC41-1126A978DC56}"/>
               </a:ext>
             </a:extLst>
           </p:cNvPr>
@@ -4968,7 +4968,7 @@
           <p:cNvPr id="14" name="">
             <a:extLst xmlns:a="http://schemas.openxmlformats.org/drawingml/2006/main">
               <a:ext uri="{FF2B5EF4-FFF2-40B4-BE49-F238E27FC236}">
-                <a16:creationId xmlns:a16="http://schemas.microsoft.com/office/drawing/2014/main" id="{21AD1FD7-E33E-4721-99D9-5577D4AB2303}"/>
+                <a16:creationId xmlns:a16="http://schemas.microsoft.com/office/drawing/2014/main" id="{80BDEA59-89FA-4D71-B336-BC5B5BBA761D}"/>
               </a:ext>
             </a:extLst>
           </p:cNvPr>
@@ -5002,7 +5002,7 @@
           <p:cNvPr id="15" name="">
             <a:extLst xmlns:a="http://schemas.openxmlformats.org/drawingml/2006/main">
               <a:ext uri="{FF2B5EF4-FFF2-40B4-BE49-F238E27FC236}">
-                <a16:creationId xmlns:a16="http://schemas.microsoft.com/office/drawing/2014/main" id="{51CE2C57-9745-46F2-A806-EA264090C953}"/>
+                <a16:creationId xmlns:a16="http://schemas.microsoft.com/office/drawing/2014/main" id="{B0A8C6E9-27E5-4293-81EC-96A5249CC96C}"/>
               </a:ext>
             </a:extLst>
           </p:cNvPr>
@@ -5034,7 +5034,7 @@
           <p:cNvPr id="16" name="">
             <a:extLst xmlns:a="http://schemas.openxmlformats.org/drawingml/2006/main">
               <a:ext uri="{FF2B5EF4-FFF2-40B4-BE49-F238E27FC236}">
-                <a16:creationId xmlns:a16="http://schemas.microsoft.com/office/drawing/2014/main" id="{70261BBA-9E23-4F47-9F0D-4FF8F6549BE0}"/>
+                <a16:creationId xmlns:a16="http://schemas.microsoft.com/office/drawing/2014/main" id="{9BE0A7F8-870C-4D0C-B321-F785BD10DB2B}"/>
               </a:ext>
             </a:extLst>
           </p:cNvPr>
@@ -5091,7 +5091,7 @@
           <p:cNvPr id="17" name="">
             <a:extLst xmlns:a="http://schemas.openxmlformats.org/drawingml/2006/main">
               <a:ext uri="{FF2B5EF4-FFF2-40B4-BE49-F238E27FC236}">
-                <a16:creationId xmlns:a16="http://schemas.microsoft.com/office/drawing/2014/main" id="{E2F7B484-6BCA-486B-B4D6-6FAFD0763A87}"/>
+                <a16:creationId xmlns:a16="http://schemas.microsoft.com/office/drawing/2014/main" id="{FE00AD72-FB3E-4F6F-BBE9-3D413FB4F0F0}"/>
               </a:ext>
             </a:extLst>
           </p:cNvPr>
@@ -5148,7 +5148,7 @@
           <p:cNvPr id="18" name="">
             <a:extLst xmlns:a="http://schemas.openxmlformats.org/drawingml/2006/main">
               <a:ext uri="{FF2B5EF4-FFF2-40B4-BE49-F238E27FC236}">
-                <a16:creationId xmlns:a16="http://schemas.microsoft.com/office/drawing/2014/main" id="{95958AAB-9D57-4448-A92C-2E7E712AF4C9}"/>
+                <a16:creationId xmlns:a16="http://schemas.microsoft.com/office/drawing/2014/main" id="{4CB3A8E0-320B-45D3-88D4-246AC099D777}"/>
               </a:ext>
             </a:extLst>
           </p:cNvPr>
@@ -5182,7 +5182,7 @@
           <p:cNvPr id="19" name="">
             <a:extLst xmlns:a="http://schemas.openxmlformats.org/drawingml/2006/main">
               <a:ext uri="{FF2B5EF4-FFF2-40B4-BE49-F238E27FC236}">
-                <a16:creationId xmlns:a16="http://schemas.microsoft.com/office/drawing/2014/main" id="{1BE621FB-C696-4D1D-B71E-7D0D79F579EB}"/>
+                <a16:creationId xmlns:a16="http://schemas.microsoft.com/office/drawing/2014/main" id="{5CE54ADD-1FCA-45CE-BE3D-86FEF2CFED73}"/>
               </a:ext>
             </a:extLst>
           </p:cNvPr>
@@ -5214,7 +5214,7 @@
           <p:cNvPr id="20" name="">
             <a:extLst xmlns:a="http://schemas.openxmlformats.org/drawingml/2006/main">
               <a:ext uri="{FF2B5EF4-FFF2-40B4-BE49-F238E27FC236}">
-                <a16:creationId xmlns:a16="http://schemas.microsoft.com/office/drawing/2014/main" id="{976E3FCF-8307-44D3-AB8D-045027B362FF}"/>
+                <a16:creationId xmlns:a16="http://schemas.microsoft.com/office/drawing/2014/main" id="{2BE56012-2E99-4FB6-969E-4D887BAC7ADC}"/>
               </a:ext>
             </a:extLst>
           </p:cNvPr>
@@ -5271,7 +5271,7 @@
           <p:cNvPr id="21" name="">
             <a:extLst xmlns:a="http://schemas.openxmlformats.org/drawingml/2006/main">
               <a:ext uri="{FF2B5EF4-FFF2-40B4-BE49-F238E27FC236}">
-                <a16:creationId xmlns:a16="http://schemas.microsoft.com/office/drawing/2014/main" id="{1A59DA90-A286-4FAE-89D2-4BEDAD621EB1}"/>
+                <a16:creationId xmlns:a16="http://schemas.microsoft.com/office/drawing/2014/main" id="{BD362F11-9660-41F7-B9D1-22AFE8C84625}"/>
               </a:ext>
             </a:extLst>
           </p:cNvPr>
@@ -5328,7 +5328,7 @@
           <p:cNvPr id="22" name="">
             <a:extLst xmlns:a="http://schemas.openxmlformats.org/drawingml/2006/main">
               <a:ext uri="{FF2B5EF4-FFF2-40B4-BE49-F238E27FC236}">
-                <a16:creationId xmlns:a16="http://schemas.microsoft.com/office/drawing/2014/main" id="{3755D24C-5E20-45AA-8726-CD737AD5E3EA}"/>
+                <a16:creationId xmlns:a16="http://schemas.microsoft.com/office/drawing/2014/main" id="{A7A6F88C-EB0C-4B29-8D61-0B0B19C327ED}"/>
               </a:ext>
             </a:extLst>
           </p:cNvPr>
@@ -5383,7 +5383,7 @@
     </p:spTree>
     <p:extLst>
       <p:ext uri="{BB962C8B-B14F-4D97-AF65-F5344CB8AC3E}">
-        <p14:creationId xmlns:p14="http://schemas.microsoft.com/office/powerpoint/2010/main" val="352197688"/>
+        <p14:creationId xmlns:p14="http://schemas.microsoft.com/office/powerpoint/2010/main" val="1789217142"/>
       </p:ext>
     </p:extLst>
   </p:cSld>
@@ -5584,7 +5584,7 @@
           <p:cNvPr id="23" name="">
             <a:extLst xmlns:a="http://schemas.openxmlformats.org/drawingml/2006/main">
               <a:ext uri="{FF2B5EF4-FFF2-40B4-BE49-F238E27FC236}">
-                <a16:creationId xmlns:a16="http://schemas.microsoft.com/office/drawing/2014/main" id="{3CC8C859-53BB-4287-AAC3-488CD099153E}"/>
+                <a16:creationId xmlns:a16="http://schemas.microsoft.com/office/drawing/2014/main" id="{5AE20C27-8C28-413D-8316-9940EB42D594}"/>
               </a:ext>
             </a:extLst>
           </p:cNvPr>
@@ -5616,7 +5616,7 @@
           <p:cNvPr id="2" name="">
             <a:extLst xmlns:a="http://schemas.openxmlformats.org/drawingml/2006/main">
               <a:ext uri="{FF2B5EF4-FFF2-40B4-BE49-F238E27FC236}">
-                <a16:creationId xmlns:a16="http://schemas.microsoft.com/office/drawing/2014/main" id="{F0AC03FE-C5CA-4011-9976-F1F801B46412}"/>
+                <a16:creationId xmlns:a16="http://schemas.microsoft.com/office/drawing/2014/main" id="{A3C29A9C-F175-44E6-BFA9-BF48322A7449}"/>
               </a:ext>
             </a:extLst>
           </p:cNvPr>
@@ -5673,7 +5673,7 @@
           <p:cNvPr id="3" name="">
             <a:extLst xmlns:a="http://schemas.openxmlformats.org/drawingml/2006/main">
               <a:ext uri="{FF2B5EF4-FFF2-40B4-BE49-F238E27FC236}">
-                <a16:creationId xmlns:a16="http://schemas.microsoft.com/office/drawing/2014/main" id="{74A9E698-4E23-487C-AC2A-4CE9651C131E}"/>
+                <a16:creationId xmlns:a16="http://schemas.microsoft.com/office/drawing/2014/main" id="{8611BAEB-F30F-4561-B934-CA1A97D295C4}"/>
               </a:ext>
             </a:extLst>
           </p:cNvPr>
@@ -5705,7 +5705,7 @@
           <p:cNvPr id="4" name="">
             <a:extLst xmlns:a="http://schemas.openxmlformats.org/drawingml/2006/main">
               <a:ext uri="{FF2B5EF4-FFF2-40B4-BE49-F238E27FC236}">
-                <a16:creationId xmlns:a16="http://schemas.microsoft.com/office/drawing/2014/main" id="{7FBD29E2-6990-4CAF-8B5F-C363538BE5FC}"/>
+                <a16:creationId xmlns:a16="http://schemas.microsoft.com/office/drawing/2014/main" id="{B0C91D8A-6111-4B7B-8037-3004BA7CCB81}"/>
               </a:ext>
             </a:extLst>
           </p:cNvPr>
@@ -5762,7 +5762,7 @@
           <p:cNvPr id="5" name="">
             <a:extLst xmlns:a="http://schemas.openxmlformats.org/drawingml/2006/main">
               <a:ext uri="{FF2B5EF4-FFF2-40B4-BE49-F238E27FC236}">
-                <a16:creationId xmlns:a16="http://schemas.microsoft.com/office/drawing/2014/main" id="{2EB1C7A6-48A8-41DB-962D-7A5C130D05CA}"/>
+                <a16:creationId xmlns:a16="http://schemas.microsoft.com/office/drawing/2014/main" id="{5871512F-3DE7-4E12-82EB-AD12BD7EF46D}"/>
               </a:ext>
             </a:extLst>
           </p:cNvPr>
@@ -5819,7 +5819,7 @@
           <p:cNvPr id="6" name="">
             <a:extLst xmlns:a="http://schemas.openxmlformats.org/drawingml/2006/main">
               <a:ext uri="{FF2B5EF4-FFF2-40B4-BE49-F238E27FC236}">
-                <a16:creationId xmlns:a16="http://schemas.microsoft.com/office/drawing/2014/main" id="{815618D0-0864-48AE-9993-4AC755603E76}"/>
+                <a16:creationId xmlns:a16="http://schemas.microsoft.com/office/drawing/2014/main" id="{4383A1DD-C975-4C46-9DB5-4193EBD01DBF}"/>
               </a:ext>
             </a:extLst>
           </p:cNvPr>
@@ -5876,7 +5876,7 @@
           <p:cNvPr id="7" name="">
             <a:extLst xmlns:a="http://schemas.openxmlformats.org/drawingml/2006/main">
               <a:ext uri="{FF2B5EF4-FFF2-40B4-BE49-F238E27FC236}">
-                <a16:creationId xmlns:a16="http://schemas.microsoft.com/office/drawing/2014/main" id="{A6ADE9BA-03B6-48ED-9A4B-B66C1D4D85A1}"/>
+                <a16:creationId xmlns:a16="http://schemas.microsoft.com/office/drawing/2014/main" id="{9A9F40E0-C7DF-4A1B-A2E4-687A64F5AAF8}"/>
               </a:ext>
             </a:extLst>
           </p:cNvPr>
@@ -5908,7 +5908,7 @@
           <p:cNvPr id="8" name="">
             <a:extLst xmlns:a="http://schemas.openxmlformats.org/drawingml/2006/main">
               <a:ext uri="{FF2B5EF4-FFF2-40B4-BE49-F238E27FC236}">
-                <a16:creationId xmlns:a16="http://schemas.microsoft.com/office/drawing/2014/main" id="{909F82C6-0D49-4AE7-8B69-4CB5B6BD12E8}"/>
+                <a16:creationId xmlns:a16="http://schemas.microsoft.com/office/drawing/2014/main" id="{6EAB8725-D7E3-4C5C-86C6-6AA34D8E6A06}"/>
               </a:ext>
             </a:extLst>
           </p:cNvPr>
@@ -5965,7 +5965,7 @@
           <p:cNvPr id="9" name="">
             <a:extLst xmlns:a="http://schemas.openxmlformats.org/drawingml/2006/main">
               <a:ext uri="{FF2B5EF4-FFF2-40B4-BE49-F238E27FC236}">
-                <a16:creationId xmlns:a16="http://schemas.microsoft.com/office/drawing/2014/main" id="{A2491C09-8EDC-4D7F-8FEB-253C31BB3CA8}"/>
+                <a16:creationId xmlns:a16="http://schemas.microsoft.com/office/drawing/2014/main" id="{96C45332-02C0-44AB-BA23-B1F801EE4AC3}"/>
               </a:ext>
             </a:extLst>
           </p:cNvPr>
@@ -6022,7 +6022,7 @@
           <p:cNvPr id="10" name="">
             <a:extLst xmlns:a="http://schemas.openxmlformats.org/drawingml/2006/main">
               <a:ext uri="{FF2B5EF4-FFF2-40B4-BE49-F238E27FC236}">
-                <a16:creationId xmlns:a16="http://schemas.microsoft.com/office/drawing/2014/main" id="{C57F659E-1F71-4E5F-8F5A-746C192DDF68}"/>
+                <a16:creationId xmlns:a16="http://schemas.microsoft.com/office/drawing/2014/main" id="{CC254875-E437-4A11-BA90-3B44F06511E9}"/>
               </a:ext>
             </a:extLst>
           </p:cNvPr>
@@ -6056,7 +6056,7 @@
           <p:cNvPr id="11" name="">
             <a:extLst xmlns:a="http://schemas.openxmlformats.org/drawingml/2006/main">
               <a:ext uri="{FF2B5EF4-FFF2-40B4-BE49-F238E27FC236}">
-                <a16:creationId xmlns:a16="http://schemas.microsoft.com/office/drawing/2014/main" id="{9AA6D161-6543-4F84-839C-476D50858345}"/>
+                <a16:creationId xmlns:a16="http://schemas.microsoft.com/office/drawing/2014/main" id="{8ECBA649-F124-4BE1-A439-127665FEF249}"/>
               </a:ext>
             </a:extLst>
           </p:cNvPr>
@@ -6088,7 +6088,7 @@
           <p:cNvPr id="12" name="">
             <a:extLst xmlns:a="http://schemas.openxmlformats.org/drawingml/2006/main">
               <a:ext uri="{FF2B5EF4-FFF2-40B4-BE49-F238E27FC236}">
-                <a16:creationId xmlns:a16="http://schemas.microsoft.com/office/drawing/2014/main" id="{6085BA04-1B6C-49E4-9042-F4CC08E08C72}"/>
+                <a16:creationId xmlns:a16="http://schemas.microsoft.com/office/drawing/2014/main" id="{1B786FFD-FCB6-4CE1-904B-C1DC6BE26AAB}"/>
               </a:ext>
             </a:extLst>
           </p:cNvPr>
@@ -6145,7 +6145,7 @@
           <p:cNvPr id="13" name="">
             <a:extLst xmlns:a="http://schemas.openxmlformats.org/drawingml/2006/main">
               <a:ext uri="{FF2B5EF4-FFF2-40B4-BE49-F238E27FC236}">
-                <a16:creationId xmlns:a16="http://schemas.microsoft.com/office/drawing/2014/main" id="{5725899C-73BB-4B46-A55F-EE42FB9A9519}"/>
+                <a16:creationId xmlns:a16="http://schemas.microsoft.com/office/drawing/2014/main" id="{00C8D481-3189-4F71-8D34-A7E2E7436982}"/>
               </a:ext>
             </a:extLst>
           </p:cNvPr>
@@ -6202,7 +6202,7 @@
           <p:cNvPr id="14" name="">
             <a:extLst xmlns:a="http://schemas.openxmlformats.org/drawingml/2006/main">
               <a:ext uri="{FF2B5EF4-FFF2-40B4-BE49-F238E27FC236}">
-                <a16:creationId xmlns:a16="http://schemas.microsoft.com/office/drawing/2014/main" id="{DE5EF78F-448A-4A46-92A4-B3951486B71C}"/>
+                <a16:creationId xmlns:a16="http://schemas.microsoft.com/office/drawing/2014/main" id="{2C0E4770-F6CF-426F-B31F-89A6DB0AA0F1}"/>
               </a:ext>
             </a:extLst>
           </p:cNvPr>
@@ -6236,7 +6236,7 @@
           <p:cNvPr id="15" name="">
             <a:extLst xmlns:a="http://schemas.openxmlformats.org/drawingml/2006/main">
               <a:ext uri="{FF2B5EF4-FFF2-40B4-BE49-F238E27FC236}">
-                <a16:creationId xmlns:a16="http://schemas.microsoft.com/office/drawing/2014/main" id="{F09CE458-4A05-4A8D-8796-44AAA1071A18}"/>
+                <a16:creationId xmlns:a16="http://schemas.microsoft.com/office/drawing/2014/main" id="{9BF62402-3BFF-4852-BF04-E603B23C2C0B}"/>
               </a:ext>
             </a:extLst>
           </p:cNvPr>
@@ -6268,7 +6268,7 @@
           <p:cNvPr id="16" name="">
             <a:extLst xmlns:a="http://schemas.openxmlformats.org/drawingml/2006/main">
               <a:ext uri="{FF2B5EF4-FFF2-40B4-BE49-F238E27FC236}">
-                <a16:creationId xmlns:a16="http://schemas.microsoft.com/office/drawing/2014/main" id="{6E96F131-CC1C-4C4C-8FFB-52BE74B9E067}"/>
+                <a16:creationId xmlns:a16="http://schemas.microsoft.com/office/drawing/2014/main" id="{7259F729-A8FF-4E2B-B313-617398778B38}"/>
               </a:ext>
             </a:extLst>
           </p:cNvPr>
@@ -6325,7 +6325,7 @@
           <p:cNvPr id="17" name="">
             <a:extLst xmlns:a="http://schemas.openxmlformats.org/drawingml/2006/main">
               <a:ext uri="{FF2B5EF4-FFF2-40B4-BE49-F238E27FC236}">
-                <a16:creationId xmlns:a16="http://schemas.microsoft.com/office/drawing/2014/main" id="{7C1792F8-0A8F-4F63-8E39-2CAA7CD19BA6}"/>
+                <a16:creationId xmlns:a16="http://schemas.microsoft.com/office/drawing/2014/main" id="{73673008-D473-41CA-A6EE-30907AD3B2F8}"/>
               </a:ext>
             </a:extLst>
           </p:cNvPr>
@@ -6382,7 +6382,7 @@
           <p:cNvPr id="18" name="">
             <a:extLst xmlns:a="http://schemas.openxmlformats.org/drawingml/2006/main">
               <a:ext uri="{FF2B5EF4-FFF2-40B4-BE49-F238E27FC236}">
-                <a16:creationId xmlns:a16="http://schemas.microsoft.com/office/drawing/2014/main" id="{6FAB323A-2A1F-4BAE-A900-C4A33EA85AF2}"/>
+                <a16:creationId xmlns:a16="http://schemas.microsoft.com/office/drawing/2014/main" id="{4D52E273-ADAE-4775-9A8D-B1F4807D9698}"/>
               </a:ext>
             </a:extLst>
           </p:cNvPr>
@@ -6416,7 +6416,7 @@
           <p:cNvPr id="19" name="">
             <a:extLst xmlns:a="http://schemas.openxmlformats.org/drawingml/2006/main">
               <a:ext uri="{FF2B5EF4-FFF2-40B4-BE49-F238E27FC236}">
-                <a16:creationId xmlns:a16="http://schemas.microsoft.com/office/drawing/2014/main" id="{379A422D-DAF6-4EB1-A15F-5C490E2FD68B}"/>
+                <a16:creationId xmlns:a16="http://schemas.microsoft.com/office/drawing/2014/main" id="{804B88F8-1C78-4428-BEB5-016B916336A1}"/>
               </a:ext>
             </a:extLst>
           </p:cNvPr>
@@ -6448,7 +6448,7 @@
           <p:cNvPr id="20" name="">
             <a:extLst xmlns:a="http://schemas.openxmlformats.org/drawingml/2006/main">
               <a:ext uri="{FF2B5EF4-FFF2-40B4-BE49-F238E27FC236}">
-                <a16:creationId xmlns:a16="http://schemas.microsoft.com/office/drawing/2014/main" id="{4AD3F909-B269-4451-A63D-23B441FA6006}"/>
+                <a16:creationId xmlns:a16="http://schemas.microsoft.com/office/drawing/2014/main" id="{B698D52B-CD27-445F-91C3-56C3F091DAA2}"/>
               </a:ext>
             </a:extLst>
           </p:cNvPr>
@@ -6505,7 +6505,7 @@
           <p:cNvPr id="21" name="">
             <a:extLst xmlns:a="http://schemas.openxmlformats.org/drawingml/2006/main">
               <a:ext uri="{FF2B5EF4-FFF2-40B4-BE49-F238E27FC236}">
-                <a16:creationId xmlns:a16="http://schemas.microsoft.com/office/drawing/2014/main" id="{073DFD2C-6658-4A1D-B67B-D87F67FD6DAE}"/>
+                <a16:creationId xmlns:a16="http://schemas.microsoft.com/office/drawing/2014/main" id="{10DE7456-CAB5-45F2-8BAE-9C2770A99726}"/>
               </a:ext>
             </a:extLst>
           </p:cNvPr>
@@ -6562,7 +6562,7 @@
           <p:cNvPr id="22" name="">
             <a:extLst xmlns:a="http://schemas.openxmlformats.org/drawingml/2006/main">
               <a:ext uri="{FF2B5EF4-FFF2-40B4-BE49-F238E27FC236}">
-                <a16:creationId xmlns:a16="http://schemas.microsoft.com/office/drawing/2014/main" id="{6660E5F0-AC53-494F-BAEC-1D5CFC3C7F6A}"/>
+                <a16:creationId xmlns:a16="http://schemas.microsoft.com/office/drawing/2014/main" id="{73031EE5-BF01-4DCB-A6EF-D8BFC29FB76E}"/>
               </a:ext>
             </a:extLst>
           </p:cNvPr>
@@ -6617,7 +6617,7 @@
     </p:spTree>
     <p:extLst>
       <p:ext uri="{BB962C8B-B14F-4D97-AF65-F5344CB8AC3E}">
-        <p14:creationId xmlns:p14="http://schemas.microsoft.com/office/powerpoint/2010/main" val="775912257"/>
+        <p14:creationId xmlns:p14="http://schemas.microsoft.com/office/powerpoint/2010/main" val="723937693"/>
       </p:ext>
     </p:extLst>
   </p:cSld>
@@ -6818,7 +6818,7 @@
           <p:cNvPr id="16" name="">
             <a:extLst xmlns:a="http://schemas.openxmlformats.org/drawingml/2006/main">
               <a:ext uri="{FF2B5EF4-FFF2-40B4-BE49-F238E27FC236}">
-                <a16:creationId xmlns:a16="http://schemas.microsoft.com/office/drawing/2014/main" id="{C81AB020-EC12-4645-82F5-8A628AC3F75C}"/>
+                <a16:creationId xmlns:a16="http://schemas.microsoft.com/office/drawing/2014/main" id="{E6A87502-3EA9-417E-A413-005E9EB6E816}"/>
               </a:ext>
             </a:extLst>
           </p:cNvPr>
@@ -6850,7 +6850,7 @@
           <p:cNvPr id="2" name="">
             <a:extLst xmlns:a="http://schemas.openxmlformats.org/drawingml/2006/main">
               <a:ext uri="{FF2B5EF4-FFF2-40B4-BE49-F238E27FC236}">
-                <a16:creationId xmlns:a16="http://schemas.microsoft.com/office/drawing/2014/main" id="{25045F3F-BA2F-4409-B711-3891884F7DD8}"/>
+                <a16:creationId xmlns:a16="http://schemas.microsoft.com/office/drawing/2014/main" id="{52E0181E-DDE6-47F1-8A16-4F1CC6BB1565}"/>
               </a:ext>
             </a:extLst>
           </p:cNvPr>
@@ -6907,7 +6907,7 @@
           <p:cNvPr id="3" name="">
             <a:extLst xmlns:a="http://schemas.openxmlformats.org/drawingml/2006/main">
               <a:ext uri="{FF2B5EF4-FFF2-40B4-BE49-F238E27FC236}">
-                <a16:creationId xmlns:a16="http://schemas.microsoft.com/office/drawing/2014/main" id="{DA3D7E16-6280-4FB1-8DCA-A3833AD3320D}"/>
+                <a16:creationId xmlns:a16="http://schemas.microsoft.com/office/drawing/2014/main" id="{59D5A588-85DC-48BB-BE6A-0160A416EC1E}"/>
               </a:ext>
             </a:extLst>
           </p:cNvPr>
@@ -6939,7 +6939,7 @@
           <p:cNvPr id="4" name="">
             <a:extLst xmlns:a="http://schemas.openxmlformats.org/drawingml/2006/main">
               <a:ext uri="{FF2B5EF4-FFF2-40B4-BE49-F238E27FC236}">
-                <a16:creationId xmlns:a16="http://schemas.microsoft.com/office/drawing/2014/main" id="{BD9F4359-1E4E-48B4-9D47-0DFB4FB1A3BF}"/>
+                <a16:creationId xmlns:a16="http://schemas.microsoft.com/office/drawing/2014/main" id="{AF7B6F4A-E648-49D1-A646-D7B26EB14BB8}"/>
               </a:ext>
             </a:extLst>
           </p:cNvPr>
@@ -6996,7 +6996,7 @@
           <p:cNvPr id="5" name="">
             <a:extLst xmlns:a="http://schemas.openxmlformats.org/drawingml/2006/main">
               <a:ext uri="{FF2B5EF4-FFF2-40B4-BE49-F238E27FC236}">
-                <a16:creationId xmlns:a16="http://schemas.microsoft.com/office/drawing/2014/main" id="{7D53EEE1-6A4C-472A-858F-C92132D50036}"/>
+                <a16:creationId xmlns:a16="http://schemas.microsoft.com/office/drawing/2014/main" id="{E55182C5-2C71-4C4D-988B-B834514A9365}"/>
               </a:ext>
             </a:extLst>
           </p:cNvPr>
@@ -7053,7 +7053,7 @@
           <p:cNvPr id="6" name="">
             <a:extLst xmlns:a="http://schemas.openxmlformats.org/drawingml/2006/main">
               <a:ext uri="{FF2B5EF4-FFF2-40B4-BE49-F238E27FC236}">
-                <a16:creationId xmlns:a16="http://schemas.microsoft.com/office/drawing/2014/main" id="{91CE0E67-4288-458D-A1C1-22BFC7098923}"/>
+                <a16:creationId xmlns:a16="http://schemas.microsoft.com/office/drawing/2014/main" id="{3E8BA102-C162-4849-8FD8-3201BB4A16FE}"/>
               </a:ext>
             </a:extLst>
           </p:cNvPr>
@@ -7110,7 +7110,7 @@
           <p:cNvPr id="7" name="">
             <a:extLst xmlns:a="http://schemas.openxmlformats.org/drawingml/2006/main">
               <a:ext uri="{FF2B5EF4-FFF2-40B4-BE49-F238E27FC236}">
-                <a16:creationId xmlns:a16="http://schemas.microsoft.com/office/drawing/2014/main" id="{10F3022A-D48D-4724-A40E-EFC79B4FCBDA}"/>
+                <a16:creationId xmlns:a16="http://schemas.microsoft.com/office/drawing/2014/main" id="{67093E8A-CD1C-4141-A447-1ABA3BB4BA85}"/>
               </a:ext>
             </a:extLst>
           </p:cNvPr>
@@ -7142,7 +7142,7 @@
           <p:cNvPr id="8" name="">
             <a:extLst xmlns:a="http://schemas.openxmlformats.org/drawingml/2006/main">
               <a:ext uri="{FF2B5EF4-FFF2-40B4-BE49-F238E27FC236}">
-                <a16:creationId xmlns:a16="http://schemas.microsoft.com/office/drawing/2014/main" id="{19AEDA3E-0EB6-418E-990D-6B446A648627}"/>
+                <a16:creationId xmlns:a16="http://schemas.microsoft.com/office/drawing/2014/main" id="{AF268E75-EA4B-40DC-9AA8-3F4D743E56FA}"/>
               </a:ext>
             </a:extLst>
           </p:cNvPr>
@@ -7199,7 +7199,7 @@
           <p:cNvPr id="9" name="">
             <a:extLst xmlns:a="http://schemas.openxmlformats.org/drawingml/2006/main">
               <a:ext uri="{FF2B5EF4-FFF2-40B4-BE49-F238E27FC236}">
-                <a16:creationId xmlns:a16="http://schemas.microsoft.com/office/drawing/2014/main" id="{E86174A3-0BAD-4DB0-9CD3-AC4A2C38C752}"/>
+                <a16:creationId xmlns:a16="http://schemas.microsoft.com/office/drawing/2014/main" id="{BD27DFD3-FD52-48DA-93C5-EE60CD0E2DA5}"/>
               </a:ext>
             </a:extLst>
           </p:cNvPr>
@@ -7256,7 +7256,7 @@
           <p:cNvPr id="10" name="">
             <a:extLst xmlns:a="http://schemas.openxmlformats.org/drawingml/2006/main">
               <a:ext uri="{FF2B5EF4-FFF2-40B4-BE49-F238E27FC236}">
-                <a16:creationId xmlns:a16="http://schemas.microsoft.com/office/drawing/2014/main" id="{AAE75FD1-6902-4760-AF48-A690E5015910}"/>
+                <a16:creationId xmlns:a16="http://schemas.microsoft.com/office/drawing/2014/main" id="{EE9B8632-F648-46B8-B4F5-5658C7BAA9C7}"/>
               </a:ext>
             </a:extLst>
           </p:cNvPr>
@@ -7313,7 +7313,7 @@
           <p:cNvPr id="11" name="">
             <a:extLst xmlns:a="http://schemas.openxmlformats.org/drawingml/2006/main">
               <a:ext uri="{FF2B5EF4-FFF2-40B4-BE49-F238E27FC236}">
-                <a16:creationId xmlns:a16="http://schemas.microsoft.com/office/drawing/2014/main" id="{8BE38F47-AB44-4C18-8C28-30A9A5C97CA6}"/>
+                <a16:creationId xmlns:a16="http://schemas.microsoft.com/office/drawing/2014/main" id="{D0EDA5C1-613A-4A22-95E4-7FF34699958F}"/>
               </a:ext>
             </a:extLst>
           </p:cNvPr>
@@ -7345,7 +7345,7 @@
           <p:cNvPr id="12" name="">
             <a:extLst xmlns:a="http://schemas.openxmlformats.org/drawingml/2006/main">
               <a:ext uri="{FF2B5EF4-FFF2-40B4-BE49-F238E27FC236}">
-                <a16:creationId xmlns:a16="http://schemas.microsoft.com/office/drawing/2014/main" id="{8A135652-7D7F-431F-BB2A-2BBD6DEBE42B}"/>
+                <a16:creationId xmlns:a16="http://schemas.microsoft.com/office/drawing/2014/main" id="{8A074D31-E178-43C2-AC15-103CF7C048C7}"/>
               </a:ext>
             </a:extLst>
           </p:cNvPr>
@@ -7402,7 +7402,7 @@
           <p:cNvPr id="13" name="">
             <a:extLst xmlns:a="http://schemas.openxmlformats.org/drawingml/2006/main">
               <a:ext uri="{FF2B5EF4-FFF2-40B4-BE49-F238E27FC236}">
-                <a16:creationId xmlns:a16="http://schemas.microsoft.com/office/drawing/2014/main" id="{9A359A42-88B7-4A95-9728-01C45A8712B5}"/>
+                <a16:creationId xmlns:a16="http://schemas.microsoft.com/office/drawing/2014/main" id="{66D059BA-94BD-4F85-A8B5-D1F71D76C31B}"/>
               </a:ext>
             </a:extLst>
           </p:cNvPr>
@@ -7459,7 +7459,7 @@
           <p:cNvPr id="14" name="">
             <a:extLst xmlns:a="http://schemas.openxmlformats.org/drawingml/2006/main">
               <a:ext uri="{FF2B5EF4-FFF2-40B4-BE49-F238E27FC236}">
-                <a16:creationId xmlns:a16="http://schemas.microsoft.com/office/drawing/2014/main" id="{B18CF563-5BDB-4716-A9FB-DE2531B12D2E}"/>
+                <a16:creationId xmlns:a16="http://schemas.microsoft.com/office/drawing/2014/main" id="{D401B360-CDF9-4528-B072-5F8E71EB3221}"/>
               </a:ext>
             </a:extLst>
           </p:cNvPr>
@@ -7516,7 +7516,7 @@
           <p:cNvPr id="15" name="">
             <a:extLst xmlns:a="http://schemas.openxmlformats.org/drawingml/2006/main">
               <a:ext uri="{FF2B5EF4-FFF2-40B4-BE49-F238E27FC236}">
-                <a16:creationId xmlns:a16="http://schemas.microsoft.com/office/drawing/2014/main" id="{00C9E771-EBDC-45B2-8DE8-33C700593F3B}"/>
+                <a16:creationId xmlns:a16="http://schemas.microsoft.com/office/drawing/2014/main" id="{DE655120-7A61-4A7F-821F-E6A0085C2328}"/>
               </a:ext>
             </a:extLst>
           </p:cNvPr>
@@ -7571,7 +7571,7 @@
     </p:spTree>
     <p:extLst>
       <p:ext uri="{BB962C8B-B14F-4D97-AF65-F5344CB8AC3E}">
-        <p14:creationId xmlns:p14="http://schemas.microsoft.com/office/powerpoint/2010/main" val="1746260284"/>
+        <p14:creationId xmlns:p14="http://schemas.microsoft.com/office/powerpoint/2010/main" val="2108135147"/>
       </p:ext>
     </p:extLst>
   </p:cSld>
@@ -7772,7 +7772,7 @@
           <p:cNvPr id="23" name="">
             <a:extLst xmlns:a="http://schemas.openxmlformats.org/drawingml/2006/main">
               <a:ext uri="{FF2B5EF4-FFF2-40B4-BE49-F238E27FC236}">
-                <a16:creationId xmlns:a16="http://schemas.microsoft.com/office/drawing/2014/main" id="{12EB1617-C46C-464A-B6F6-0D4B0F65900B}"/>
+                <a16:creationId xmlns:a16="http://schemas.microsoft.com/office/drawing/2014/main" id="{3C689403-002B-46E6-901D-23EF2FCDBC8F}"/>
               </a:ext>
             </a:extLst>
           </p:cNvPr>
@@ -7804,7 +7804,7 @@
           <p:cNvPr id="2" name="">
             <a:extLst xmlns:a="http://schemas.openxmlformats.org/drawingml/2006/main">
               <a:ext uri="{FF2B5EF4-FFF2-40B4-BE49-F238E27FC236}">
-                <a16:creationId xmlns:a16="http://schemas.microsoft.com/office/drawing/2014/main" id="{D07B2ABA-85D3-4169-A22A-47D759F5A61A}"/>
+                <a16:creationId xmlns:a16="http://schemas.microsoft.com/office/drawing/2014/main" id="{2E917EE6-10C4-49FC-A4C7-2FEDC10D68A8}"/>
               </a:ext>
             </a:extLst>
           </p:cNvPr>
@@ -7861,7 +7861,7 @@
           <p:cNvPr id="3" name="">
             <a:extLst xmlns:a="http://schemas.openxmlformats.org/drawingml/2006/main">
               <a:ext uri="{FF2B5EF4-FFF2-40B4-BE49-F238E27FC236}">
-                <a16:creationId xmlns:a16="http://schemas.microsoft.com/office/drawing/2014/main" id="{170B2A08-89D2-4849-B490-D2B543A8835C}"/>
+                <a16:creationId xmlns:a16="http://schemas.microsoft.com/office/drawing/2014/main" id="{4DD52476-CCFB-43E0-8F83-D781B512BF10}"/>
               </a:ext>
             </a:extLst>
           </p:cNvPr>
@@ -7893,7 +7893,7 @@
           <p:cNvPr id="4" name="">
             <a:extLst xmlns:a="http://schemas.openxmlformats.org/drawingml/2006/main">
               <a:ext uri="{FF2B5EF4-FFF2-40B4-BE49-F238E27FC236}">
-                <a16:creationId xmlns:a16="http://schemas.microsoft.com/office/drawing/2014/main" id="{5000D211-C8AC-4818-B534-1E150395B7F8}"/>
+                <a16:creationId xmlns:a16="http://schemas.microsoft.com/office/drawing/2014/main" id="{0A1643E6-5148-4AE4-AF9D-A1F83FF8A6A7}"/>
               </a:ext>
             </a:extLst>
           </p:cNvPr>
@@ -7950,7 +7950,7 @@
           <p:cNvPr id="5" name="">
             <a:extLst xmlns:a="http://schemas.openxmlformats.org/drawingml/2006/main">
               <a:ext uri="{FF2B5EF4-FFF2-40B4-BE49-F238E27FC236}">
-                <a16:creationId xmlns:a16="http://schemas.microsoft.com/office/drawing/2014/main" id="{9CC36ADB-6A0E-4C9D-8A9B-3764503C061A}"/>
+                <a16:creationId xmlns:a16="http://schemas.microsoft.com/office/drawing/2014/main" id="{0D13A1FC-DC2E-4499-BBAB-AB02A002CE7C}"/>
               </a:ext>
             </a:extLst>
           </p:cNvPr>
@@ -8007,7 +8007,7 @@
           <p:cNvPr id="6" name="">
             <a:extLst xmlns:a="http://schemas.openxmlformats.org/drawingml/2006/main">
               <a:ext uri="{FF2B5EF4-FFF2-40B4-BE49-F238E27FC236}">
-                <a16:creationId xmlns:a16="http://schemas.microsoft.com/office/drawing/2014/main" id="{95596245-D3C3-465A-9E14-CDCCEE3DC985}"/>
+                <a16:creationId xmlns:a16="http://schemas.microsoft.com/office/drawing/2014/main" id="{93BCBF09-3917-458D-A0F4-6C41BDAC9866}"/>
               </a:ext>
             </a:extLst>
           </p:cNvPr>
@@ -8064,7 +8064,7 @@
           <p:cNvPr id="7" name="">
             <a:extLst xmlns:a="http://schemas.openxmlformats.org/drawingml/2006/main">
               <a:ext uri="{FF2B5EF4-FFF2-40B4-BE49-F238E27FC236}">
-                <a16:creationId xmlns:a16="http://schemas.microsoft.com/office/drawing/2014/main" id="{941AA965-3D24-43B8-8DC4-C43CE2B03A2B}"/>
+                <a16:creationId xmlns:a16="http://schemas.microsoft.com/office/drawing/2014/main" id="{7CBFB077-AA8E-4644-98C5-30DB92089EA9}"/>
               </a:ext>
             </a:extLst>
           </p:cNvPr>
@@ -8096,7 +8096,7 @@
           <p:cNvPr id="8" name="">
             <a:extLst xmlns:a="http://schemas.openxmlformats.org/drawingml/2006/main">
               <a:ext uri="{FF2B5EF4-FFF2-40B4-BE49-F238E27FC236}">
-                <a16:creationId xmlns:a16="http://schemas.microsoft.com/office/drawing/2014/main" id="{7B6630A1-9686-44DB-8E7E-CB1895EF4419}"/>
+                <a16:creationId xmlns:a16="http://schemas.microsoft.com/office/drawing/2014/main" id="{2B1A8599-6159-4EBC-A782-D738BBD45682}"/>
               </a:ext>
             </a:extLst>
           </p:cNvPr>
@@ -8153,7 +8153,7 @@
           <p:cNvPr id="9" name="">
             <a:extLst xmlns:a="http://schemas.openxmlformats.org/drawingml/2006/main">
               <a:ext uri="{FF2B5EF4-FFF2-40B4-BE49-F238E27FC236}">
-                <a16:creationId xmlns:a16="http://schemas.microsoft.com/office/drawing/2014/main" id="{33EA10A2-29A5-436D-8974-19A063C4A5E3}"/>
+                <a16:creationId xmlns:a16="http://schemas.microsoft.com/office/drawing/2014/main" id="{2AAC54C2-DEB5-4E76-86F6-E6B64C12623A}"/>
               </a:ext>
             </a:extLst>
           </p:cNvPr>
@@ -8210,19 +8210,19 @@
           <p:cNvPr id="10" name="">
             <a:extLst xmlns:a="http://schemas.openxmlformats.org/drawingml/2006/main">
               <a:ext uri="{FF2B5EF4-FFF2-40B4-BE49-F238E27FC236}">
-                <a16:creationId xmlns:a16="http://schemas.microsoft.com/office/drawing/2014/main" id="{41F6896F-ECBC-42F7-A621-4274DCD0B9AE}"/>
-              </a:ext>
-            </a:extLst>
-          </p:cNvPr>
-          <p:cNvSpPr>
-            <a:spLocks xmlns:a="http://schemas.openxmlformats.org/drawingml/2006/main" noGrp="1"/>
-          </p:cNvSpPr>
-          <p:nvPr/>
-        </p:nvSpPr>
-        <p:spPr>
-          <a:xfrm xmlns:a="http://schemas.openxmlformats.org/drawingml/2006/main">
-            <a:off x="914400" y="1257300"/>
-            <a:ext cx="10363200" cy="781050"/>
+                <a16:creationId xmlns:a16="http://schemas.microsoft.com/office/drawing/2014/main" id="{EA3A9669-3D0D-4725-BC7D-877F9A1BC48E}"/>
+              </a:ext>
+            </a:extLst>
+          </p:cNvPr>
+          <p:cNvSpPr>
+            <a:spLocks xmlns:a="http://schemas.openxmlformats.org/drawingml/2006/main" noGrp="1"/>
+          </p:cNvSpPr>
+          <p:nvPr/>
+        </p:nvSpPr>
+        <p:spPr>
+          <a:xfrm xmlns:a="http://schemas.openxmlformats.org/drawingml/2006/main">
+            <a:off x="857250" y="1219200"/>
+            <a:ext cx="10477500" cy="742950"/>
           </a:xfrm>
           <a:prstGeom xmlns:a="http://schemas.openxmlformats.org/drawingml/2006/main" prst="rect">
             <a:avLst/>
@@ -8239,7 +8239,7 @@
           <a:lstStyle xmlns:a="http://schemas.openxmlformats.org/drawingml/2006/main"/>
           <a:p xmlns:a="http://schemas.openxmlformats.org/drawingml/2006/main">
             <a:pPr algn="ctr">
-              <a:defRPr sz="2175" b="1">
+              <a:defRPr sz="2100" b="1">
                 <a:solidFill>
                   <a:srgbClr val="17253A"/>
                 </a:solidFill>
@@ -8249,7 +8249,7 @@
               </a:defRPr>
             </a:pPr>
             <a:r>
-              <a:rPr sz="2175" b="1">
+              <a:rPr sz="2100" b="1">
                 <a:solidFill>
                   <a:srgbClr val="17253A"/>
                 </a:solidFill>
@@ -8267,28 +8267,30 @@
           <p:cNvPr id="11" name="">
             <a:extLst xmlns:a="http://schemas.openxmlformats.org/drawingml/2006/main">
               <a:ext uri="{FF2B5EF4-FFF2-40B4-BE49-F238E27FC236}">
-                <a16:creationId xmlns:a16="http://schemas.microsoft.com/office/drawing/2014/main" id="{AC6DD83A-7EF8-4F35-B10A-64B6A898D555}"/>
-              </a:ext>
-            </a:extLst>
-          </p:cNvPr>
-          <p:cNvSpPr>
-            <a:spLocks xmlns:a="http://schemas.openxmlformats.org/drawingml/2006/main" noGrp="1"/>
-          </p:cNvSpPr>
-          <p:nvPr/>
-        </p:nvSpPr>
-        <p:spPr>
-          <a:xfrm xmlns:a="http://schemas.openxmlformats.org/drawingml/2006/main">
-            <a:off x="1000125" y="2247900"/>
-            <a:ext cx="476250" cy="476250"/>
-          </a:xfrm>
-          <a:prstGeom xmlns:a="http://schemas.openxmlformats.org/drawingml/2006/main" prst="ellipse">
+                <a16:creationId xmlns:a16="http://schemas.microsoft.com/office/drawing/2014/main" id="{A9DA143C-2BBD-47EE-9BA9-22F6D4732DEB}"/>
+              </a:ext>
+            </a:extLst>
+          </p:cNvPr>
+          <p:cNvSpPr>
+            <a:spLocks xmlns:a="http://schemas.openxmlformats.org/drawingml/2006/main" noGrp="1"/>
+          </p:cNvSpPr>
+          <p:nvPr/>
+        </p:nvSpPr>
+        <p:spPr>
+          <a:xfrm xmlns:a="http://schemas.openxmlformats.org/drawingml/2006/main">
+            <a:off x="971550" y="2124075"/>
+            <a:ext cx="38100" cy="3524250"/>
+          </a:xfrm>
+          <a:prstGeom xmlns:a="http://schemas.openxmlformats.org/drawingml/2006/main" prst="rect">
             <a:avLst/>
           </a:prstGeom>
           <a:solidFill xmlns:a="http://schemas.openxmlformats.org/drawingml/2006/main">
-            <a:srgbClr val="18324A"/>
+            <a:srgbClr val="2C6E73"/>
           </a:solidFill>
           <a:ln xmlns:a="http://schemas.openxmlformats.org/drawingml/2006/main" w="0">
-            <a:noFill/>
+            <a:solidFill>
+              <a:srgbClr val="2C6E73"/>
+            </a:solidFill>
           </a:ln>
         </p:spPr>
       </p:sp>
@@ -8297,19 +8299,19 @@
           <p:cNvPr id="12" name="">
             <a:extLst xmlns:a="http://schemas.openxmlformats.org/drawingml/2006/main">
               <a:ext uri="{FF2B5EF4-FFF2-40B4-BE49-F238E27FC236}">
-                <a16:creationId xmlns:a16="http://schemas.microsoft.com/office/drawing/2014/main" id="{813293B3-6DA4-43EB-9B23-2C69EC96FAAB}"/>
-              </a:ext>
-            </a:extLst>
-          </p:cNvPr>
-          <p:cNvSpPr>
-            <a:spLocks xmlns:a="http://schemas.openxmlformats.org/drawingml/2006/main" noGrp="1"/>
-          </p:cNvSpPr>
-          <p:nvPr/>
-        </p:nvSpPr>
-        <p:spPr>
-          <a:xfrm xmlns:a="http://schemas.openxmlformats.org/drawingml/2006/main">
-            <a:off x="1000125" y="2276475"/>
-            <a:ext cx="476250" cy="419100"/>
+                <a16:creationId xmlns:a16="http://schemas.microsoft.com/office/drawing/2014/main" id="{6C2B098A-5F07-4EA6-9FF6-12C7AC86FABC}"/>
+              </a:ext>
+            </a:extLst>
+          </p:cNvPr>
+          <p:cNvSpPr>
+            <a:spLocks xmlns:a="http://schemas.openxmlformats.org/drawingml/2006/main" noGrp="1"/>
+          </p:cNvSpPr>
+          <p:nvPr/>
+        </p:nvSpPr>
+        <p:spPr>
+          <a:xfrm xmlns:a="http://schemas.openxmlformats.org/drawingml/2006/main">
+            <a:off x="1162050" y="2200275"/>
+            <a:ext cx="400050" cy="400050"/>
           </a:xfrm>
           <a:prstGeom xmlns:a="http://schemas.openxmlformats.org/drawingml/2006/main" prst="rect">
             <a:avLst/>
@@ -8326,9 +8328,9 @@
           <a:lstStyle xmlns:a="http://schemas.openxmlformats.org/drawingml/2006/main"/>
           <a:p xmlns:a="http://schemas.openxmlformats.org/drawingml/2006/main">
             <a:pPr algn="ctr">
-              <a:defRPr sz="1350" b="1">
-                <a:solidFill>
-                  <a:srgbClr val="FFFFFF"/>
+              <a:defRPr sz="1125" b="1">
+                <a:solidFill>
+                  <a:srgbClr val="2C6E73"/>
                 </a:solidFill>
                 <a:latin typeface="Arial"/>
                 <a:ea typeface="Arial"/>
@@ -8336,9 +8338,9 @@
               </a:defRPr>
             </a:pPr>
             <a:r>
-              <a:rPr sz="1350" b="1">
-                <a:solidFill>
-                  <a:srgbClr val="FFFFFF"/>
+              <a:rPr sz="1125" b="1">
+                <a:solidFill>
+                  <a:srgbClr val="2C6E73"/>
                 </a:solidFill>
                 <a:latin typeface="Arial"/>
                 <a:ea typeface="Arial"/>
@@ -8354,19 +8356,19 @@
           <p:cNvPr id="13" name="">
             <a:extLst xmlns:a="http://schemas.openxmlformats.org/drawingml/2006/main">
               <a:ext uri="{FF2B5EF4-FFF2-40B4-BE49-F238E27FC236}">
-                <a16:creationId xmlns:a16="http://schemas.microsoft.com/office/drawing/2014/main" id="{F4C38FC8-8C00-4335-87D2-73E67AA0D98C}"/>
-              </a:ext>
-            </a:extLst>
-          </p:cNvPr>
-          <p:cNvSpPr>
-            <a:spLocks xmlns:a="http://schemas.openxmlformats.org/drawingml/2006/main" noGrp="1"/>
-          </p:cNvSpPr>
-          <p:nvPr/>
-        </p:nvSpPr>
-        <p:spPr>
-          <a:xfrm xmlns:a="http://schemas.openxmlformats.org/drawingml/2006/main">
-            <a:off x="1714500" y="2181225"/>
-            <a:ext cx="9429750" cy="609600"/>
+                <a16:creationId xmlns:a16="http://schemas.microsoft.com/office/drawing/2014/main" id="{F868235D-8827-45CF-96EF-31BE6A917D0D}"/>
+              </a:ext>
+            </a:extLst>
+          </p:cNvPr>
+          <p:cNvSpPr>
+            <a:spLocks xmlns:a="http://schemas.openxmlformats.org/drawingml/2006/main" noGrp="1"/>
+          </p:cNvSpPr>
+          <p:nvPr/>
+        </p:nvSpPr>
+        <p:spPr>
+          <a:xfrm xmlns:a="http://schemas.openxmlformats.org/drawingml/2006/main">
+            <a:off x="1714500" y="2114550"/>
+            <a:ext cx="9525000" cy="809625"/>
           </a:xfrm>
           <a:prstGeom xmlns:a="http://schemas.openxmlformats.org/drawingml/2006/main" prst="rect">
             <a:avLst/>
@@ -8383,7 +8385,7 @@
           <a:lstStyle xmlns:a="http://schemas.openxmlformats.org/drawingml/2006/main"/>
           <a:p xmlns:a="http://schemas.openxmlformats.org/drawingml/2006/main">
             <a:pPr algn="l">
-              <a:defRPr sz="1500" b="0">
+              <a:defRPr sz="1725" b="0">
                 <a:solidFill>
                   <a:srgbClr val="17253A"/>
                 </a:solidFill>
@@ -8393,7 +8395,7 @@
               </a:defRPr>
             </a:pPr>
             <a:r>
-              <a:rPr sz="1500" b="0">
+              <a:rPr sz="1725" b="0">
                 <a:solidFill>
                   <a:srgbClr val="17253A"/>
                 </a:solidFill>
@@ -8401,7 +8403,7 @@
                 <a:ea typeface="Arial"/>
                 <a:cs typeface="Arial"/>
               </a:rPr>
-              <a:t>Identify the structure: Identify the goal, constraints and useful information before calculating.</a:t>
+              <a:t>Choose a target of 30</a:t>
             </a:r>
           </a:p>
         </p:txBody>
@@ -8411,28 +8413,30 @@
           <p:cNvPr id="14" name="">
             <a:extLst xmlns:a="http://schemas.openxmlformats.org/drawingml/2006/main">
               <a:ext uri="{FF2B5EF4-FFF2-40B4-BE49-F238E27FC236}">
-                <a16:creationId xmlns:a16="http://schemas.microsoft.com/office/drawing/2014/main" id="{C3CC7220-224E-43D6-A987-DA28DFC24CEF}"/>
-              </a:ext>
-            </a:extLst>
-          </p:cNvPr>
-          <p:cNvSpPr>
-            <a:spLocks xmlns:a="http://schemas.openxmlformats.org/drawingml/2006/main" noGrp="1"/>
-          </p:cNvSpPr>
-          <p:nvPr/>
-        </p:nvSpPr>
-        <p:spPr>
-          <a:xfrm xmlns:a="http://schemas.openxmlformats.org/drawingml/2006/main">
-            <a:off x="1000125" y="2990850"/>
-            <a:ext cx="476250" cy="476250"/>
-          </a:xfrm>
-          <a:prstGeom xmlns:a="http://schemas.openxmlformats.org/drawingml/2006/main" prst="ellipse">
+                <a16:creationId xmlns:a16="http://schemas.microsoft.com/office/drawing/2014/main" id="{48905551-4F52-4280-8D14-14CE5C7E5B83}"/>
+              </a:ext>
+            </a:extLst>
+          </p:cNvPr>
+          <p:cNvSpPr>
+            <a:spLocks xmlns:a="http://schemas.openxmlformats.org/drawingml/2006/main" noGrp="1"/>
+          </p:cNvSpPr>
+          <p:nvPr/>
+        </p:nvSpPr>
+        <p:spPr>
+          <a:xfrm xmlns:a="http://schemas.openxmlformats.org/drawingml/2006/main">
+            <a:off x="1714500" y="2943225"/>
+            <a:ext cx="9334500" cy="9525"/>
+          </a:xfrm>
+          <a:prstGeom xmlns:a="http://schemas.openxmlformats.org/drawingml/2006/main" prst="rect">
             <a:avLst/>
           </a:prstGeom>
           <a:solidFill xmlns:a="http://schemas.openxmlformats.org/drawingml/2006/main">
-            <a:srgbClr val="2C6E73"/>
+            <a:srgbClr val="D9E0E6"/>
           </a:solidFill>
           <a:ln xmlns:a="http://schemas.openxmlformats.org/drawingml/2006/main" w="0">
-            <a:noFill/>
+            <a:solidFill>
+              <a:srgbClr val="D9E0E6"/>
+            </a:solidFill>
           </a:ln>
         </p:spPr>
       </p:sp>
@@ -8441,19 +8445,19 @@
           <p:cNvPr id="15" name="">
             <a:extLst xmlns:a="http://schemas.openxmlformats.org/drawingml/2006/main">
               <a:ext uri="{FF2B5EF4-FFF2-40B4-BE49-F238E27FC236}">
-                <a16:creationId xmlns:a16="http://schemas.microsoft.com/office/drawing/2014/main" id="{926E3588-5696-4054-B2F7-F079B3F1C7C3}"/>
-              </a:ext>
-            </a:extLst>
-          </p:cNvPr>
-          <p:cNvSpPr>
-            <a:spLocks xmlns:a="http://schemas.openxmlformats.org/drawingml/2006/main" noGrp="1"/>
-          </p:cNvSpPr>
-          <p:nvPr/>
-        </p:nvSpPr>
-        <p:spPr>
-          <a:xfrm xmlns:a="http://schemas.openxmlformats.org/drawingml/2006/main">
-            <a:off x="1000125" y="3019425"/>
-            <a:ext cx="476250" cy="419100"/>
+                <a16:creationId xmlns:a16="http://schemas.microsoft.com/office/drawing/2014/main" id="{77251CC6-F06E-43ED-B3FB-E9D99C2E69A6}"/>
+              </a:ext>
+            </a:extLst>
+          </p:cNvPr>
+          <p:cNvSpPr>
+            <a:spLocks xmlns:a="http://schemas.openxmlformats.org/drawingml/2006/main" noGrp="1"/>
+          </p:cNvSpPr>
+          <p:nvPr/>
+        </p:nvSpPr>
+        <p:spPr>
+          <a:xfrm xmlns:a="http://schemas.openxmlformats.org/drawingml/2006/main">
+            <a:off x="1162050" y="3076575"/>
+            <a:ext cx="400050" cy="400050"/>
           </a:xfrm>
           <a:prstGeom xmlns:a="http://schemas.openxmlformats.org/drawingml/2006/main" prst="rect">
             <a:avLst/>
@@ -8470,9 +8474,9 @@
           <a:lstStyle xmlns:a="http://schemas.openxmlformats.org/drawingml/2006/main"/>
           <a:p xmlns:a="http://schemas.openxmlformats.org/drawingml/2006/main">
             <a:pPr algn="ctr">
-              <a:defRPr sz="1350" b="1">
-                <a:solidFill>
-                  <a:srgbClr val="FFFFFF"/>
+              <a:defRPr sz="1125" b="1">
+                <a:solidFill>
+                  <a:srgbClr val="2C6E73"/>
                 </a:solidFill>
                 <a:latin typeface="Arial"/>
                 <a:ea typeface="Arial"/>
@@ -8480,9 +8484,9 @@
               </a:defRPr>
             </a:pPr>
             <a:r>
-              <a:rPr sz="1350" b="1">
-                <a:solidFill>
-                  <a:srgbClr val="FFFFFF"/>
+              <a:rPr sz="1125" b="1">
+                <a:solidFill>
+                  <a:srgbClr val="2C6E73"/>
                 </a:solidFill>
                 <a:latin typeface="Arial"/>
                 <a:ea typeface="Arial"/>
@@ -8498,19 +8502,19 @@
           <p:cNvPr id="16" name="">
             <a:extLst xmlns:a="http://schemas.openxmlformats.org/drawingml/2006/main">
               <a:ext uri="{FF2B5EF4-FFF2-40B4-BE49-F238E27FC236}">
-                <a16:creationId xmlns:a16="http://schemas.microsoft.com/office/drawing/2014/main" id="{CACB0BB5-F6B5-4193-841E-7D691B278172}"/>
-              </a:ext>
-            </a:extLst>
-          </p:cNvPr>
-          <p:cNvSpPr>
-            <a:spLocks xmlns:a="http://schemas.openxmlformats.org/drawingml/2006/main" noGrp="1"/>
-          </p:cNvSpPr>
-          <p:nvPr/>
-        </p:nvSpPr>
-        <p:spPr>
-          <a:xfrm xmlns:a="http://schemas.openxmlformats.org/drawingml/2006/main">
-            <a:off x="1714500" y="2924175"/>
-            <a:ext cx="9429750" cy="609600"/>
+                <a16:creationId xmlns:a16="http://schemas.microsoft.com/office/drawing/2014/main" id="{136E0B26-E3D8-431E-AC27-C98094A06F89}"/>
+              </a:ext>
+            </a:extLst>
+          </p:cNvPr>
+          <p:cNvSpPr>
+            <a:spLocks xmlns:a="http://schemas.openxmlformats.org/drawingml/2006/main" noGrp="1"/>
+          </p:cNvSpPr>
+          <p:nvPr/>
+        </p:nvSpPr>
+        <p:spPr>
+          <a:xfrm xmlns:a="http://schemas.openxmlformats.org/drawingml/2006/main">
+            <a:off x="1714500" y="2990850"/>
+            <a:ext cx="9525000" cy="809625"/>
           </a:xfrm>
           <a:prstGeom xmlns:a="http://schemas.openxmlformats.org/drawingml/2006/main" prst="rect">
             <a:avLst/>
@@ -8527,7 +8531,7 @@
           <a:lstStyle xmlns:a="http://schemas.openxmlformats.org/drawingml/2006/main"/>
           <a:p xmlns:a="http://schemas.openxmlformats.org/drawingml/2006/main">
             <a:pPr algn="l">
-              <a:defRPr sz="1500" b="0">
+              <a:defRPr sz="1725" b="0">
                 <a:solidFill>
                   <a:srgbClr val="17253A"/>
                 </a:solidFill>
@@ -8537,7 +8541,7 @@
               </a:defRPr>
             </a:pPr>
             <a:r>
-              <a:rPr sz="1500" b="0">
+              <a:rPr sz="1725" b="0">
                 <a:solidFill>
                   <a:srgbClr val="17253A"/>
                 </a:solidFill>
@@ -8545,7 +8549,7 @@
                 <a:ea typeface="Arial"/>
                 <a:cs typeface="Arial"/>
               </a:rPr>
-              <a:t>Set up the method: Choose a representation and complete each labelled step.</a:t>
+              <a:t>Use 3/4 of 40 = 30</a:t>
             </a:r>
           </a:p>
         </p:txBody>
@@ -8555,28 +8559,30 @@
           <p:cNvPr id="17" name="">
             <a:extLst xmlns:a="http://schemas.openxmlformats.org/drawingml/2006/main">
               <a:ext uri="{FF2B5EF4-FFF2-40B4-BE49-F238E27FC236}">
-                <a16:creationId xmlns:a16="http://schemas.microsoft.com/office/drawing/2014/main" id="{2582377B-1A50-450D-9E87-F2967C604979}"/>
-              </a:ext>
-            </a:extLst>
-          </p:cNvPr>
-          <p:cNvSpPr>
-            <a:spLocks xmlns:a="http://schemas.openxmlformats.org/drawingml/2006/main" noGrp="1"/>
-          </p:cNvSpPr>
-          <p:nvPr/>
-        </p:nvSpPr>
-        <p:spPr>
-          <a:xfrm xmlns:a="http://schemas.openxmlformats.org/drawingml/2006/main">
-            <a:off x="1000125" y="3733800"/>
-            <a:ext cx="476250" cy="476250"/>
-          </a:xfrm>
-          <a:prstGeom xmlns:a="http://schemas.openxmlformats.org/drawingml/2006/main" prst="ellipse">
+                <a16:creationId xmlns:a16="http://schemas.microsoft.com/office/drawing/2014/main" id="{AA33D18E-EAED-4706-A43B-10D3CF3AA390}"/>
+              </a:ext>
+            </a:extLst>
+          </p:cNvPr>
+          <p:cNvSpPr>
+            <a:spLocks xmlns:a="http://schemas.openxmlformats.org/drawingml/2006/main" noGrp="1"/>
+          </p:cNvSpPr>
+          <p:nvPr/>
+        </p:nvSpPr>
+        <p:spPr>
+          <a:xfrm xmlns:a="http://schemas.openxmlformats.org/drawingml/2006/main">
+            <a:off x="1714500" y="3819525"/>
+            <a:ext cx="9334500" cy="9525"/>
+          </a:xfrm>
+          <a:prstGeom xmlns:a="http://schemas.openxmlformats.org/drawingml/2006/main" prst="rect">
             <a:avLst/>
           </a:prstGeom>
           <a:solidFill xmlns:a="http://schemas.openxmlformats.org/drawingml/2006/main">
-            <a:srgbClr val="2C6E73"/>
+            <a:srgbClr val="D9E0E6"/>
           </a:solidFill>
           <a:ln xmlns:a="http://schemas.openxmlformats.org/drawingml/2006/main" w="0">
-            <a:noFill/>
+            <a:solidFill>
+              <a:srgbClr val="D9E0E6"/>
+            </a:solidFill>
           </a:ln>
         </p:spPr>
       </p:sp>
@@ -8585,19 +8591,19 @@
           <p:cNvPr id="18" name="">
             <a:extLst xmlns:a="http://schemas.openxmlformats.org/drawingml/2006/main">
               <a:ext uri="{FF2B5EF4-FFF2-40B4-BE49-F238E27FC236}">
-                <a16:creationId xmlns:a16="http://schemas.microsoft.com/office/drawing/2014/main" id="{A0350EA3-FEE2-424E-BF4E-5FC94031CC12}"/>
-              </a:ext>
-            </a:extLst>
-          </p:cNvPr>
-          <p:cNvSpPr>
-            <a:spLocks xmlns:a="http://schemas.openxmlformats.org/drawingml/2006/main" noGrp="1"/>
-          </p:cNvSpPr>
-          <p:nvPr/>
-        </p:nvSpPr>
-        <p:spPr>
-          <a:xfrm xmlns:a="http://schemas.openxmlformats.org/drawingml/2006/main">
-            <a:off x="1000125" y="3762375"/>
-            <a:ext cx="476250" cy="419100"/>
+                <a16:creationId xmlns:a16="http://schemas.microsoft.com/office/drawing/2014/main" id="{B9D4EDA1-8452-4483-A5E9-3F5B61258599}"/>
+              </a:ext>
+            </a:extLst>
+          </p:cNvPr>
+          <p:cNvSpPr>
+            <a:spLocks xmlns:a="http://schemas.openxmlformats.org/drawingml/2006/main" noGrp="1"/>
+          </p:cNvSpPr>
+          <p:nvPr/>
+        </p:nvSpPr>
+        <p:spPr>
+          <a:xfrm xmlns:a="http://schemas.openxmlformats.org/drawingml/2006/main">
+            <a:off x="1162050" y="3952875"/>
+            <a:ext cx="400050" cy="400050"/>
           </a:xfrm>
           <a:prstGeom xmlns:a="http://schemas.openxmlformats.org/drawingml/2006/main" prst="rect">
             <a:avLst/>
@@ -8614,9 +8620,9 @@
           <a:lstStyle xmlns:a="http://schemas.openxmlformats.org/drawingml/2006/main"/>
           <a:p xmlns:a="http://schemas.openxmlformats.org/drawingml/2006/main">
             <a:pPr algn="ctr">
-              <a:defRPr sz="1350" b="1">
-                <a:solidFill>
-                  <a:srgbClr val="FFFFFF"/>
+              <a:defRPr sz="1125" b="1">
+                <a:solidFill>
+                  <a:srgbClr val="2C6E73"/>
                 </a:solidFill>
                 <a:latin typeface="Arial"/>
                 <a:ea typeface="Arial"/>
@@ -8624,9 +8630,9 @@
               </a:defRPr>
             </a:pPr>
             <a:r>
-              <a:rPr sz="1350" b="1">
-                <a:solidFill>
-                  <a:srgbClr val="FFFFFF"/>
+              <a:rPr sz="1125" b="1">
+                <a:solidFill>
+                  <a:srgbClr val="2C6E73"/>
                 </a:solidFill>
                 <a:latin typeface="Arial"/>
                 <a:ea typeface="Arial"/>
@@ -8642,19 +8648,19 @@
           <p:cNvPr id="19" name="">
             <a:extLst xmlns:a="http://schemas.openxmlformats.org/drawingml/2006/main">
               <a:ext uri="{FF2B5EF4-FFF2-40B4-BE49-F238E27FC236}">
-                <a16:creationId xmlns:a16="http://schemas.microsoft.com/office/drawing/2014/main" id="{E0145C90-DDF4-4A70-89D5-781D16CE2184}"/>
-              </a:ext>
-            </a:extLst>
-          </p:cNvPr>
-          <p:cNvSpPr>
-            <a:spLocks xmlns:a="http://schemas.openxmlformats.org/drawingml/2006/main" noGrp="1"/>
-          </p:cNvSpPr>
-          <p:nvPr/>
-        </p:nvSpPr>
-        <p:spPr>
-          <a:xfrm xmlns:a="http://schemas.openxmlformats.org/drawingml/2006/main">
-            <a:off x="1714500" y="3667125"/>
-            <a:ext cx="9429750" cy="609600"/>
+                <a16:creationId xmlns:a16="http://schemas.microsoft.com/office/drawing/2014/main" id="{8EC9A0B9-277B-4F7F-9787-5896CEFA20A3}"/>
+              </a:ext>
+            </a:extLst>
+          </p:cNvPr>
+          <p:cNvSpPr>
+            <a:spLocks xmlns:a="http://schemas.openxmlformats.org/drawingml/2006/main" noGrp="1"/>
+          </p:cNvSpPr>
+          <p:nvPr/>
+        </p:nvSpPr>
+        <p:spPr>
+          <a:xfrm xmlns:a="http://schemas.openxmlformats.org/drawingml/2006/main">
+            <a:off x="1714500" y="3867150"/>
+            <a:ext cx="9525000" cy="809625"/>
           </a:xfrm>
           <a:prstGeom xmlns:a="http://schemas.openxmlformats.org/drawingml/2006/main" prst="rect">
             <a:avLst/>
@@ -8671,7 +8677,7 @@
           <a:lstStyle xmlns:a="http://schemas.openxmlformats.org/drawingml/2006/main"/>
           <a:p xmlns:a="http://schemas.openxmlformats.org/drawingml/2006/main">
             <a:pPr algn="l">
-              <a:defRPr sz="1500" b="0">
+              <a:defRPr sz="1725" b="0">
                 <a:solidFill>
                   <a:srgbClr val="17253A"/>
                 </a:solidFill>
@@ -8681,7 +8687,7 @@
               </a:defRPr>
             </a:pPr>
             <a:r>
-              <a:rPr sz="1500" b="0">
+              <a:rPr sz="1725" b="0">
                 <a:solidFill>
                   <a:srgbClr val="17253A"/>
                 </a:solidFill>
@@ -8689,7 +8695,7 @@
                 <a:ea typeface="Arial"/>
                 <a:cs typeface="Arial"/>
               </a:rPr>
-              <a:t>Complete the calculation: Answers vary and must preserve the stated values and give 30.</a:t>
+              <a:t>Use 25% of 120 = 30</a:t>
             </a:r>
           </a:p>
         </p:txBody>
@@ -8699,28 +8705,30 @@
           <p:cNvPr id="20" name="">
             <a:extLst xmlns:a="http://schemas.openxmlformats.org/drawingml/2006/main">
               <a:ext uri="{FF2B5EF4-FFF2-40B4-BE49-F238E27FC236}">
-                <a16:creationId xmlns:a16="http://schemas.microsoft.com/office/drawing/2014/main" id="{A70EBA8D-A356-4432-8809-B5E1D5C8026D}"/>
-              </a:ext>
-            </a:extLst>
-          </p:cNvPr>
-          <p:cNvSpPr>
-            <a:spLocks xmlns:a="http://schemas.openxmlformats.org/drawingml/2006/main" noGrp="1"/>
-          </p:cNvSpPr>
-          <p:nvPr/>
-        </p:nvSpPr>
-        <p:spPr>
-          <a:xfrm xmlns:a="http://schemas.openxmlformats.org/drawingml/2006/main">
-            <a:off x="1000125" y="4476750"/>
-            <a:ext cx="476250" cy="476250"/>
-          </a:xfrm>
-          <a:prstGeom xmlns:a="http://schemas.openxmlformats.org/drawingml/2006/main" prst="ellipse">
+                <a16:creationId xmlns:a16="http://schemas.microsoft.com/office/drawing/2014/main" id="{0A482D1E-9B6F-4FD7-92C3-E268BA657237}"/>
+              </a:ext>
+            </a:extLst>
+          </p:cNvPr>
+          <p:cNvSpPr>
+            <a:spLocks xmlns:a="http://schemas.openxmlformats.org/drawingml/2006/main" noGrp="1"/>
+          </p:cNvSpPr>
+          <p:nvPr/>
+        </p:nvSpPr>
+        <p:spPr>
+          <a:xfrm xmlns:a="http://schemas.openxmlformats.org/drawingml/2006/main">
+            <a:off x="1714500" y="4695825"/>
+            <a:ext cx="9334500" cy="9525"/>
+          </a:xfrm>
+          <a:prstGeom xmlns:a="http://schemas.openxmlformats.org/drawingml/2006/main" prst="rect">
             <a:avLst/>
           </a:prstGeom>
           <a:solidFill xmlns:a="http://schemas.openxmlformats.org/drawingml/2006/main">
-            <a:srgbClr val="2C6E73"/>
+            <a:srgbClr val="D9E0E6"/>
           </a:solidFill>
           <a:ln xmlns:a="http://schemas.openxmlformats.org/drawingml/2006/main" w="0">
-            <a:noFill/>
+            <a:solidFill>
+              <a:srgbClr val="D9E0E6"/>
+            </a:solidFill>
           </a:ln>
         </p:spPr>
       </p:sp>
@@ -8729,19 +8737,19 @@
           <p:cNvPr id="21" name="">
             <a:extLst xmlns:a="http://schemas.openxmlformats.org/drawingml/2006/main">
               <a:ext uri="{FF2B5EF4-FFF2-40B4-BE49-F238E27FC236}">
-                <a16:creationId xmlns:a16="http://schemas.microsoft.com/office/drawing/2014/main" id="{FA7C7863-D40C-416C-B048-9DBACE724D2A}"/>
-              </a:ext>
-            </a:extLst>
-          </p:cNvPr>
-          <p:cNvSpPr>
-            <a:spLocks xmlns:a="http://schemas.openxmlformats.org/drawingml/2006/main" noGrp="1"/>
-          </p:cNvSpPr>
-          <p:nvPr/>
-        </p:nvSpPr>
-        <p:spPr>
-          <a:xfrm xmlns:a="http://schemas.openxmlformats.org/drawingml/2006/main">
-            <a:off x="1000125" y="4505325"/>
-            <a:ext cx="476250" cy="419100"/>
+                <a16:creationId xmlns:a16="http://schemas.microsoft.com/office/drawing/2014/main" id="{5249E9F8-F155-4C2A-BA1C-3CE3E78FB295}"/>
+              </a:ext>
+            </a:extLst>
+          </p:cNvPr>
+          <p:cNvSpPr>
+            <a:spLocks xmlns:a="http://schemas.openxmlformats.org/drawingml/2006/main" noGrp="1"/>
+          </p:cNvSpPr>
+          <p:nvPr/>
+        </p:nvSpPr>
+        <p:spPr>
+          <a:xfrm xmlns:a="http://schemas.openxmlformats.org/drawingml/2006/main">
+            <a:off x="1162050" y="4829175"/>
+            <a:ext cx="400050" cy="400050"/>
           </a:xfrm>
           <a:prstGeom xmlns:a="http://schemas.openxmlformats.org/drawingml/2006/main" prst="rect">
             <a:avLst/>
@@ -8758,9 +8766,9 @@
           <a:lstStyle xmlns:a="http://schemas.openxmlformats.org/drawingml/2006/main"/>
           <a:p xmlns:a="http://schemas.openxmlformats.org/drawingml/2006/main">
             <a:pPr algn="ctr">
-              <a:defRPr sz="1350" b="1">
-                <a:solidFill>
-                  <a:srgbClr val="FFFFFF"/>
+              <a:defRPr sz="1125" b="1">
+                <a:solidFill>
+                  <a:srgbClr val="2F785D"/>
                 </a:solidFill>
                 <a:latin typeface="Arial"/>
                 <a:ea typeface="Arial"/>
@@ -8768,9 +8776,9 @@
               </a:defRPr>
             </a:pPr>
             <a:r>
-              <a:rPr sz="1350" b="1">
-                <a:solidFill>
-                  <a:srgbClr val="FFFFFF"/>
+              <a:rPr sz="1125" b="1">
+                <a:solidFill>
+                  <a:srgbClr val="2F785D"/>
                 </a:solidFill>
                 <a:latin typeface="Arial"/>
                 <a:ea typeface="Arial"/>
@@ -8786,19 +8794,19 @@
           <p:cNvPr id="22" name="">
             <a:extLst xmlns:a="http://schemas.openxmlformats.org/drawingml/2006/main">
               <a:ext uri="{FF2B5EF4-FFF2-40B4-BE49-F238E27FC236}">
-                <a16:creationId xmlns:a16="http://schemas.microsoft.com/office/drawing/2014/main" id="{688C492E-8EB3-4F0F-AFDE-8AA3AFFBD12A}"/>
-              </a:ext>
-            </a:extLst>
-          </p:cNvPr>
-          <p:cNvSpPr>
-            <a:spLocks xmlns:a="http://schemas.openxmlformats.org/drawingml/2006/main" noGrp="1"/>
-          </p:cNvSpPr>
-          <p:nvPr/>
-        </p:nvSpPr>
-        <p:spPr>
-          <a:xfrm xmlns:a="http://schemas.openxmlformats.org/drawingml/2006/main">
-            <a:off x="1714500" y="4410075"/>
-            <a:ext cx="9429750" cy="609600"/>
+                <a16:creationId xmlns:a16="http://schemas.microsoft.com/office/drawing/2014/main" id="{C65912CA-20C2-4F66-A3D7-48590CE0CBF8}"/>
+              </a:ext>
+            </a:extLst>
+          </p:cNvPr>
+          <p:cNvSpPr>
+            <a:spLocks xmlns:a="http://schemas.openxmlformats.org/drawingml/2006/main" noGrp="1"/>
+          </p:cNvSpPr>
+          <p:nvPr/>
+        </p:nvSpPr>
+        <p:spPr>
+          <a:xfrm xmlns:a="http://schemas.openxmlformats.org/drawingml/2006/main">
+            <a:off x="1714500" y="4743450"/>
+            <a:ext cx="9525000" cy="809625"/>
           </a:xfrm>
           <a:prstGeom xmlns:a="http://schemas.openxmlformats.org/drawingml/2006/main" prst="rect">
             <a:avLst/>
@@ -8815,7 +8823,7 @@
           <a:lstStyle xmlns:a="http://schemas.openxmlformats.org/drawingml/2006/main"/>
           <a:p xmlns:a="http://schemas.openxmlformats.org/drawingml/2006/main">
             <a:pPr algn="l">
-              <a:defRPr sz="1500" b="1">
+              <a:defRPr sz="1725" b="1">
                 <a:solidFill>
                   <a:srgbClr val="2F785D"/>
                 </a:solidFill>
@@ -8825,7 +8833,7 @@
               </a:defRPr>
             </a:pPr>
             <a:r>
-              <a:rPr sz="1500" b="1">
+              <a:rPr sz="1725" b="1">
                 <a:solidFill>
                   <a:srgbClr val="2F785D"/>
                 </a:solidFill>
@@ -8833,7 +8841,7 @@
                 <a:ea typeface="Arial"/>
                 <a:cs typeface="Arial"/>
               </a:rPr>
-              <a:t>Check the result: Check the solution and explain why it satisfies every condition.</a:t>
+              <a:t>Check both calculations give 30</a:t>
             </a:r>
           </a:p>
         </p:txBody>
@@ -8841,7 +8849,7 @@
     </p:spTree>
     <p:extLst>
       <p:ext uri="{BB962C8B-B14F-4D97-AF65-F5344CB8AC3E}">
-        <p14:creationId xmlns:p14="http://schemas.microsoft.com/office/powerpoint/2010/main" val="2054785143"/>
+        <p14:creationId xmlns:p14="http://schemas.microsoft.com/office/powerpoint/2010/main" val="554546926"/>
       </p:ext>
     </p:extLst>
   </p:cSld>
@@ -9134,7 +9142,7 @@
           <p:cNvPr id="15" name="">
             <a:extLst xmlns:a="http://schemas.openxmlformats.org/drawingml/2006/main">
               <a:ext uri="{FF2B5EF4-FFF2-40B4-BE49-F238E27FC236}">
-                <a16:creationId xmlns:a16="http://schemas.microsoft.com/office/drawing/2014/main" id="{E8E68BD7-ED6A-4296-838C-25593A0EB000}"/>
+                <a16:creationId xmlns:a16="http://schemas.microsoft.com/office/drawing/2014/main" id="{FF2FED5F-7D8B-4DD6-BCF3-1CE3E62FDBAB}"/>
               </a:ext>
             </a:extLst>
           </p:cNvPr>
@@ -9166,7 +9174,7 @@
           <p:cNvPr id="2" name="">
             <a:extLst xmlns:a="http://schemas.openxmlformats.org/drawingml/2006/main">
               <a:ext uri="{FF2B5EF4-FFF2-40B4-BE49-F238E27FC236}">
-                <a16:creationId xmlns:a16="http://schemas.microsoft.com/office/drawing/2014/main" id="{DAFC61AC-A4D2-4578-861D-F658E3C801BF}"/>
+                <a16:creationId xmlns:a16="http://schemas.microsoft.com/office/drawing/2014/main" id="{AF273DFC-A4FC-4B4B-BB8E-100E05CE6071}"/>
               </a:ext>
             </a:extLst>
           </p:cNvPr>
@@ -9223,7 +9231,7 @@
           <p:cNvPr id="3" name="">
             <a:extLst xmlns:a="http://schemas.openxmlformats.org/drawingml/2006/main">
               <a:ext uri="{FF2B5EF4-FFF2-40B4-BE49-F238E27FC236}">
-                <a16:creationId xmlns:a16="http://schemas.microsoft.com/office/drawing/2014/main" id="{CEA85261-5E87-4221-9252-0309B447BED6}"/>
+                <a16:creationId xmlns:a16="http://schemas.microsoft.com/office/drawing/2014/main" id="{7CF5FB91-855E-4678-9DE9-5BC97CC3DEFF}"/>
               </a:ext>
             </a:extLst>
           </p:cNvPr>
@@ -9255,7 +9263,7 @@
           <p:cNvPr id="4" name="">
             <a:extLst xmlns:a="http://schemas.openxmlformats.org/drawingml/2006/main">
               <a:ext uri="{FF2B5EF4-FFF2-40B4-BE49-F238E27FC236}">
-                <a16:creationId xmlns:a16="http://schemas.microsoft.com/office/drawing/2014/main" id="{8AF2896E-F5EE-4474-AEE1-75578E88EDFF}"/>
+                <a16:creationId xmlns:a16="http://schemas.microsoft.com/office/drawing/2014/main" id="{E2973F4D-D12B-45B7-8DA1-E6E729504F97}"/>
               </a:ext>
             </a:extLst>
           </p:cNvPr>
@@ -9312,7 +9320,7 @@
           <p:cNvPr id="5" name="">
             <a:extLst xmlns:a="http://schemas.openxmlformats.org/drawingml/2006/main">
               <a:ext uri="{FF2B5EF4-FFF2-40B4-BE49-F238E27FC236}">
-                <a16:creationId xmlns:a16="http://schemas.microsoft.com/office/drawing/2014/main" id="{417FF81A-2E3E-48FB-BBFD-8EE1363394E6}"/>
+                <a16:creationId xmlns:a16="http://schemas.microsoft.com/office/drawing/2014/main" id="{057F582D-3C20-437D-87EC-8C2D19413960}"/>
               </a:ext>
             </a:extLst>
           </p:cNvPr>
@@ -9369,7 +9377,7 @@
           <p:cNvPr id="6" name="">
             <a:extLst xmlns:a="http://schemas.openxmlformats.org/drawingml/2006/main">
               <a:ext uri="{FF2B5EF4-FFF2-40B4-BE49-F238E27FC236}">
-                <a16:creationId xmlns:a16="http://schemas.microsoft.com/office/drawing/2014/main" id="{F4C9BAC6-C1F8-4417-968E-11B6546BC848}"/>
+                <a16:creationId xmlns:a16="http://schemas.microsoft.com/office/drawing/2014/main" id="{0819F7A4-0695-4391-B84C-0DD92BB6BEA9}"/>
               </a:ext>
             </a:extLst>
           </p:cNvPr>
@@ -9426,7 +9434,7 @@
           <p:cNvPr id="7" name="">
             <a:extLst xmlns:a="http://schemas.openxmlformats.org/drawingml/2006/main">
               <a:ext uri="{FF2B5EF4-FFF2-40B4-BE49-F238E27FC236}">
-                <a16:creationId xmlns:a16="http://schemas.microsoft.com/office/drawing/2014/main" id="{E66C2D30-8AD1-418E-8AC5-8EC3C53552DC}"/>
+                <a16:creationId xmlns:a16="http://schemas.microsoft.com/office/drawing/2014/main" id="{56201A38-7384-46A1-968C-A53674FA0C6B}"/>
               </a:ext>
             </a:extLst>
           </p:cNvPr>
@@ -9458,7 +9466,7 @@
           <p:cNvPr id="8" name="">
             <a:extLst xmlns:a="http://schemas.openxmlformats.org/drawingml/2006/main">
               <a:ext uri="{FF2B5EF4-FFF2-40B4-BE49-F238E27FC236}">
-                <a16:creationId xmlns:a16="http://schemas.microsoft.com/office/drawing/2014/main" id="{0DE0729A-71EC-4198-AAD3-8F6D1860FB5E}"/>
+                <a16:creationId xmlns:a16="http://schemas.microsoft.com/office/drawing/2014/main" id="{7E901A61-A1E2-4B8C-B37B-4F0696D75316}"/>
               </a:ext>
             </a:extLst>
           </p:cNvPr>
@@ -9515,7 +9523,7 @@
           <p:cNvPr id="9" name="">
             <a:extLst xmlns:a="http://schemas.openxmlformats.org/drawingml/2006/main">
               <a:ext uri="{FF2B5EF4-FFF2-40B4-BE49-F238E27FC236}">
-                <a16:creationId xmlns:a16="http://schemas.microsoft.com/office/drawing/2014/main" id="{48CC4CE4-19AF-4FD0-AB0A-6F7D44AA4E3A}"/>
+                <a16:creationId xmlns:a16="http://schemas.microsoft.com/office/drawing/2014/main" id="{FEADF822-259B-45FB-B429-6620A3495D5F}"/>
               </a:ext>
             </a:extLst>
           </p:cNvPr>
@@ -9572,7 +9580,7 @@
           <p:cNvPr id="10" name="">
             <a:extLst xmlns:a="http://schemas.openxmlformats.org/drawingml/2006/main">
               <a:ext uri="{FF2B5EF4-FFF2-40B4-BE49-F238E27FC236}">
-                <a16:creationId xmlns:a16="http://schemas.microsoft.com/office/drawing/2014/main" id="{6A06D252-43B6-47A7-A196-B2764AC307B7}"/>
+                <a16:creationId xmlns:a16="http://schemas.microsoft.com/office/drawing/2014/main" id="{5AD62217-6CD9-4131-85F8-3DB34E3D815C}"/>
               </a:ext>
             </a:extLst>
           </p:cNvPr>
@@ -9629,7 +9637,7 @@
           <p:cNvPr id="11" name="">
             <a:extLst xmlns:a="http://schemas.openxmlformats.org/drawingml/2006/main">
               <a:ext uri="{FF2B5EF4-FFF2-40B4-BE49-F238E27FC236}">
-                <a16:creationId xmlns:a16="http://schemas.microsoft.com/office/drawing/2014/main" id="{D482EBCD-7CE5-4E88-A05F-BDDC37D4CD6E}"/>
+                <a16:creationId xmlns:a16="http://schemas.microsoft.com/office/drawing/2014/main" id="{706BD5A2-501B-4F33-872F-FAF0225F2D20}"/>
               </a:ext>
             </a:extLst>
           </p:cNvPr>
@@ -9686,7 +9694,7 @@
           <p:cNvPr id="12" name="">
             <a:extLst xmlns:a="http://schemas.openxmlformats.org/drawingml/2006/main">
               <a:ext uri="{FF2B5EF4-FFF2-40B4-BE49-F238E27FC236}">
-                <a16:creationId xmlns:a16="http://schemas.microsoft.com/office/drawing/2014/main" id="{93700A10-EE99-425B-B357-C7392DDD247C}"/>
+                <a16:creationId xmlns:a16="http://schemas.microsoft.com/office/drawing/2014/main" id="{C40F1D4A-B8B4-48FC-9867-BD999927DCC8}"/>
               </a:ext>
             </a:extLst>
           </p:cNvPr>
@@ -9718,7 +9726,7 @@
           <p:cNvPr id="13" name="">
             <a:extLst xmlns:a="http://schemas.openxmlformats.org/drawingml/2006/main">
               <a:ext uri="{FF2B5EF4-FFF2-40B4-BE49-F238E27FC236}">
-                <a16:creationId xmlns:a16="http://schemas.microsoft.com/office/drawing/2014/main" id="{B8782252-3507-4A43-A3D1-5FBFBA4C7233}"/>
+                <a16:creationId xmlns:a16="http://schemas.microsoft.com/office/drawing/2014/main" id="{A205251D-1131-4980-B2D2-06E535226670}"/>
               </a:ext>
             </a:extLst>
           </p:cNvPr>
@@ -9775,7 +9783,7 @@
           <p:cNvPr id="14" name="">
             <a:extLst xmlns:a="http://schemas.openxmlformats.org/drawingml/2006/main">
               <a:ext uri="{FF2B5EF4-FFF2-40B4-BE49-F238E27FC236}">
-                <a16:creationId xmlns:a16="http://schemas.microsoft.com/office/drawing/2014/main" id="{9A472DE2-5C83-4D8A-BD5D-686B150B9FF7}"/>
+                <a16:creationId xmlns:a16="http://schemas.microsoft.com/office/drawing/2014/main" id="{26EE874A-7F68-4755-B038-B8C5BBF7004C}"/>
               </a:ext>
             </a:extLst>
           </p:cNvPr>
@@ -9830,7 +9838,7 @@
     </p:spTree>
     <p:extLst>
       <p:ext uri="{BB962C8B-B14F-4D97-AF65-F5344CB8AC3E}">
-        <p14:creationId xmlns:p14="http://schemas.microsoft.com/office/powerpoint/2010/main" val="643658088"/>
+        <p14:creationId xmlns:p14="http://schemas.microsoft.com/office/powerpoint/2010/main" val="199525806"/>
       </p:ext>
     </p:extLst>
   </p:cSld>
@@ -10031,7 +10039,7 @@
           <p:cNvPr id="16" name="">
             <a:extLst xmlns:a="http://schemas.openxmlformats.org/drawingml/2006/main">
               <a:ext uri="{FF2B5EF4-FFF2-40B4-BE49-F238E27FC236}">
-                <a16:creationId xmlns:a16="http://schemas.microsoft.com/office/drawing/2014/main" id="{357E2D15-19E2-49DE-872F-84131C822380}"/>
+                <a16:creationId xmlns:a16="http://schemas.microsoft.com/office/drawing/2014/main" id="{EE7F7F29-24CF-4E35-B8FC-6EDA65FDD902}"/>
               </a:ext>
             </a:extLst>
           </p:cNvPr>
@@ -10063,7 +10071,7 @@
           <p:cNvPr id="2" name="">
             <a:extLst xmlns:a="http://schemas.openxmlformats.org/drawingml/2006/main">
               <a:ext uri="{FF2B5EF4-FFF2-40B4-BE49-F238E27FC236}">
-                <a16:creationId xmlns:a16="http://schemas.microsoft.com/office/drawing/2014/main" id="{4A7DC641-5518-4034-A227-6848DD0C111A}"/>
+                <a16:creationId xmlns:a16="http://schemas.microsoft.com/office/drawing/2014/main" id="{87D8EED9-BA9D-4F60-92DC-92B9BB4D03C7}"/>
               </a:ext>
             </a:extLst>
           </p:cNvPr>
@@ -10120,7 +10128,7 @@
           <p:cNvPr id="3" name="">
             <a:extLst xmlns:a="http://schemas.openxmlformats.org/drawingml/2006/main">
               <a:ext uri="{FF2B5EF4-FFF2-40B4-BE49-F238E27FC236}">
-                <a16:creationId xmlns:a16="http://schemas.microsoft.com/office/drawing/2014/main" id="{1C77AB91-8EF8-4193-B0CA-651F87D1E3D2}"/>
+                <a16:creationId xmlns:a16="http://schemas.microsoft.com/office/drawing/2014/main" id="{4AFA7238-646C-4D03-901E-F4432CF25C62}"/>
               </a:ext>
             </a:extLst>
           </p:cNvPr>
@@ -10152,7 +10160,7 @@
           <p:cNvPr id="4" name="">
             <a:extLst xmlns:a="http://schemas.openxmlformats.org/drawingml/2006/main">
               <a:ext uri="{FF2B5EF4-FFF2-40B4-BE49-F238E27FC236}">
-                <a16:creationId xmlns:a16="http://schemas.microsoft.com/office/drawing/2014/main" id="{6A291427-17A6-47A6-8E74-EE250E5926DE}"/>
+                <a16:creationId xmlns:a16="http://schemas.microsoft.com/office/drawing/2014/main" id="{8E872CDF-81C6-4E7A-8348-8D68901011D0}"/>
               </a:ext>
             </a:extLst>
           </p:cNvPr>
@@ -10209,7 +10217,7 @@
           <p:cNvPr id="5" name="">
             <a:extLst xmlns:a="http://schemas.openxmlformats.org/drawingml/2006/main">
               <a:ext uri="{FF2B5EF4-FFF2-40B4-BE49-F238E27FC236}">
-                <a16:creationId xmlns:a16="http://schemas.microsoft.com/office/drawing/2014/main" id="{09301117-9975-4C65-AABA-65D1983E1851}"/>
+                <a16:creationId xmlns:a16="http://schemas.microsoft.com/office/drawing/2014/main" id="{F68B8DC0-4A7C-4054-8459-97D774D04FB9}"/>
               </a:ext>
             </a:extLst>
           </p:cNvPr>
@@ -10266,7 +10274,7 @@
           <p:cNvPr id="6" name="">
             <a:extLst xmlns:a="http://schemas.openxmlformats.org/drawingml/2006/main">
               <a:ext uri="{FF2B5EF4-FFF2-40B4-BE49-F238E27FC236}">
-                <a16:creationId xmlns:a16="http://schemas.microsoft.com/office/drawing/2014/main" id="{994DFB53-8B45-4717-8CCD-BF103F7915FF}"/>
+                <a16:creationId xmlns:a16="http://schemas.microsoft.com/office/drawing/2014/main" id="{3A909FE1-6641-4C59-A732-33E98090AEB4}"/>
               </a:ext>
             </a:extLst>
           </p:cNvPr>
@@ -10323,7 +10331,7 @@
           <p:cNvPr id="7" name="">
             <a:extLst xmlns:a="http://schemas.openxmlformats.org/drawingml/2006/main">
               <a:ext uri="{FF2B5EF4-FFF2-40B4-BE49-F238E27FC236}">
-                <a16:creationId xmlns:a16="http://schemas.microsoft.com/office/drawing/2014/main" id="{74800E27-3F39-471F-8E2F-18B6BB9F7ECC}"/>
+                <a16:creationId xmlns:a16="http://schemas.microsoft.com/office/drawing/2014/main" id="{94BD711F-DE82-4659-AEE3-AEA7D11FCFFF}"/>
               </a:ext>
             </a:extLst>
           </p:cNvPr>
@@ -10355,7 +10363,7 @@
           <p:cNvPr id="8" name="">
             <a:extLst xmlns:a="http://schemas.openxmlformats.org/drawingml/2006/main">
               <a:ext uri="{FF2B5EF4-FFF2-40B4-BE49-F238E27FC236}">
-                <a16:creationId xmlns:a16="http://schemas.microsoft.com/office/drawing/2014/main" id="{B71F5C42-2E77-45F3-9A5C-3A31DFD8F6DF}"/>
+                <a16:creationId xmlns:a16="http://schemas.microsoft.com/office/drawing/2014/main" id="{82F3E31D-FAA5-4ED3-B67E-7B3CB3C40821}"/>
               </a:ext>
             </a:extLst>
           </p:cNvPr>
@@ -10412,7 +10420,7 @@
           <p:cNvPr id="9" name="">
             <a:extLst xmlns:a="http://schemas.openxmlformats.org/drawingml/2006/main">
               <a:ext uri="{FF2B5EF4-FFF2-40B4-BE49-F238E27FC236}">
-                <a16:creationId xmlns:a16="http://schemas.microsoft.com/office/drawing/2014/main" id="{1FCBE061-B02D-470C-A368-0D454F3878FD}"/>
+                <a16:creationId xmlns:a16="http://schemas.microsoft.com/office/drawing/2014/main" id="{3C8B48A5-4CBA-4F98-BC40-52566A1E81D1}"/>
               </a:ext>
             </a:extLst>
           </p:cNvPr>
@@ -10469,7 +10477,7 @@
           <p:cNvPr id="10" name="">
             <a:extLst xmlns:a="http://schemas.openxmlformats.org/drawingml/2006/main">
               <a:ext uri="{FF2B5EF4-FFF2-40B4-BE49-F238E27FC236}">
-                <a16:creationId xmlns:a16="http://schemas.microsoft.com/office/drawing/2014/main" id="{46A8AE66-2DD2-4121-9DEA-F52D986A7E25}"/>
+                <a16:creationId xmlns:a16="http://schemas.microsoft.com/office/drawing/2014/main" id="{2EAEF596-A4F3-4337-B92C-09A008651D36}"/>
               </a:ext>
             </a:extLst>
           </p:cNvPr>
@@ -10526,7 +10534,7 @@
           <p:cNvPr id="11" name="">
             <a:extLst xmlns:a="http://schemas.openxmlformats.org/drawingml/2006/main">
               <a:ext uri="{FF2B5EF4-FFF2-40B4-BE49-F238E27FC236}">
-                <a16:creationId xmlns:a16="http://schemas.microsoft.com/office/drawing/2014/main" id="{8E5A2F36-A106-40FC-8EFF-6EC2F4F491E7}"/>
+                <a16:creationId xmlns:a16="http://schemas.microsoft.com/office/drawing/2014/main" id="{0F5922D8-B945-41B5-B544-2062BA8A543D}"/>
               </a:ext>
             </a:extLst>
           </p:cNvPr>
@@ -10583,7 +10591,7 @@
           <p:cNvPr id="12" name="">
             <a:extLst xmlns:a="http://schemas.openxmlformats.org/drawingml/2006/main">
               <a:ext uri="{FF2B5EF4-FFF2-40B4-BE49-F238E27FC236}">
-                <a16:creationId xmlns:a16="http://schemas.microsoft.com/office/drawing/2014/main" id="{B077023D-67A4-48CC-8946-63613CDC89AC}"/>
+                <a16:creationId xmlns:a16="http://schemas.microsoft.com/office/drawing/2014/main" id="{EF3375F6-B861-4ECF-884D-C5E7018713EB}"/>
               </a:ext>
             </a:extLst>
           </p:cNvPr>
@@ -10640,7 +10648,7 @@
           <p:cNvPr id="13" name="">
             <a:extLst xmlns:a="http://schemas.openxmlformats.org/drawingml/2006/main">
               <a:ext uri="{FF2B5EF4-FFF2-40B4-BE49-F238E27FC236}">
-                <a16:creationId xmlns:a16="http://schemas.microsoft.com/office/drawing/2014/main" id="{E96F62F9-839D-4FFD-A6B9-24C7FFE0C2E7}"/>
+                <a16:creationId xmlns:a16="http://schemas.microsoft.com/office/drawing/2014/main" id="{E13E379D-E10F-4D9F-9554-233689B4BAF4}"/>
               </a:ext>
             </a:extLst>
           </p:cNvPr>
@@ -10697,7 +10705,7 @@
           <p:cNvPr id="14" name="">
             <a:extLst xmlns:a="http://schemas.openxmlformats.org/drawingml/2006/main">
               <a:ext uri="{FF2B5EF4-FFF2-40B4-BE49-F238E27FC236}">
-                <a16:creationId xmlns:a16="http://schemas.microsoft.com/office/drawing/2014/main" id="{A931C002-5E1D-4636-98D6-FCAB7C8F3EDC}"/>
+                <a16:creationId xmlns:a16="http://schemas.microsoft.com/office/drawing/2014/main" id="{E0037162-7BC1-49DC-9153-27FB2EB58042}"/>
               </a:ext>
             </a:extLst>
           </p:cNvPr>
@@ -10754,7 +10762,7 @@
           <p:cNvPr id="15" name="">
             <a:extLst xmlns:a="http://schemas.openxmlformats.org/drawingml/2006/main">
               <a:ext uri="{FF2B5EF4-FFF2-40B4-BE49-F238E27FC236}">
-                <a16:creationId xmlns:a16="http://schemas.microsoft.com/office/drawing/2014/main" id="{EDE2BC6A-A302-4919-B67E-DAE4FC491EA8}"/>
+                <a16:creationId xmlns:a16="http://schemas.microsoft.com/office/drawing/2014/main" id="{500AFEEC-B07F-45D5-A66E-2D69EE9BE3EF}"/>
               </a:ext>
             </a:extLst>
           </p:cNvPr>
@@ -10801,7 +10809,7 @@
                 <a:ea typeface="Arial"/>
                 <a:cs typeface="Arial"/>
               </a:rPr>
-              <a:t>Answer: 244.8.</a:t>
+              <a:t>Answer: 220.8.</a:t>
             </a:r>
           </a:p>
         </p:txBody>
@@ -10809,7 +10817,7 @@
     </p:spTree>
     <p:extLst>
       <p:ext uri="{BB962C8B-B14F-4D97-AF65-F5344CB8AC3E}">
-        <p14:creationId xmlns:p14="http://schemas.microsoft.com/office/powerpoint/2010/main" val="785316837"/>
+        <p14:creationId xmlns:p14="http://schemas.microsoft.com/office/powerpoint/2010/main" val="252146251"/>
       </p:ext>
     </p:extLst>
   </p:cSld>
@@ -10964,7 +10972,7 @@
           <p:cNvPr id="16" name="">
             <a:extLst xmlns:a="http://schemas.openxmlformats.org/drawingml/2006/main">
               <a:ext uri="{FF2B5EF4-FFF2-40B4-BE49-F238E27FC236}">
-                <a16:creationId xmlns:a16="http://schemas.microsoft.com/office/drawing/2014/main" id="{273C21A0-9D59-4C81-A806-E215A053F29F}"/>
+                <a16:creationId xmlns:a16="http://schemas.microsoft.com/office/drawing/2014/main" id="{472D250D-D9DF-495B-AEE4-F03646379AE6}"/>
               </a:ext>
             </a:extLst>
           </p:cNvPr>
@@ -10996,7 +11004,7 @@
           <p:cNvPr id="2" name="">
             <a:extLst xmlns:a="http://schemas.openxmlformats.org/drawingml/2006/main">
               <a:ext uri="{FF2B5EF4-FFF2-40B4-BE49-F238E27FC236}">
-                <a16:creationId xmlns:a16="http://schemas.microsoft.com/office/drawing/2014/main" id="{29BD094E-3279-442C-9638-108AD0F458B7}"/>
+                <a16:creationId xmlns:a16="http://schemas.microsoft.com/office/drawing/2014/main" id="{B03E81C0-6DB7-43B2-80BC-70DBC61FF390}"/>
               </a:ext>
             </a:extLst>
           </p:cNvPr>
@@ -11053,7 +11061,7 @@
           <p:cNvPr id="3" name="">
             <a:extLst xmlns:a="http://schemas.openxmlformats.org/drawingml/2006/main">
               <a:ext uri="{FF2B5EF4-FFF2-40B4-BE49-F238E27FC236}">
-                <a16:creationId xmlns:a16="http://schemas.microsoft.com/office/drawing/2014/main" id="{12087F85-82DA-4730-9D32-CA220B7692BF}"/>
+                <a16:creationId xmlns:a16="http://schemas.microsoft.com/office/drawing/2014/main" id="{DE91C751-95B4-4E27-9D71-F1D8BF0F8624}"/>
               </a:ext>
             </a:extLst>
           </p:cNvPr>
@@ -11085,7 +11093,7 @@
           <p:cNvPr id="4" name="">
             <a:extLst xmlns:a="http://schemas.openxmlformats.org/drawingml/2006/main">
               <a:ext uri="{FF2B5EF4-FFF2-40B4-BE49-F238E27FC236}">
-                <a16:creationId xmlns:a16="http://schemas.microsoft.com/office/drawing/2014/main" id="{8FFBFAFE-4267-42E4-9CC3-4A43580252C6}"/>
+                <a16:creationId xmlns:a16="http://schemas.microsoft.com/office/drawing/2014/main" id="{2E4E89E5-84F7-421D-96A1-D0B3E7338F0A}"/>
               </a:ext>
             </a:extLst>
           </p:cNvPr>
@@ -11142,7 +11150,7 @@
           <p:cNvPr id="5" name="">
             <a:extLst xmlns:a="http://schemas.openxmlformats.org/drawingml/2006/main">
               <a:ext uri="{FF2B5EF4-FFF2-40B4-BE49-F238E27FC236}">
-                <a16:creationId xmlns:a16="http://schemas.microsoft.com/office/drawing/2014/main" id="{5C5A8ED4-397A-4A77-8B7C-4CA5280214C5}"/>
+                <a16:creationId xmlns:a16="http://schemas.microsoft.com/office/drawing/2014/main" id="{E9D36731-F9A1-461D-AF9D-180A09519B85}"/>
               </a:ext>
             </a:extLst>
           </p:cNvPr>
@@ -11199,7 +11207,7 @@
           <p:cNvPr id="6" name="">
             <a:extLst xmlns:a="http://schemas.openxmlformats.org/drawingml/2006/main">
               <a:ext uri="{FF2B5EF4-FFF2-40B4-BE49-F238E27FC236}">
-                <a16:creationId xmlns:a16="http://schemas.microsoft.com/office/drawing/2014/main" id="{D5B27C18-B60E-433B-BC0F-D51CCFDF7BCC}"/>
+                <a16:creationId xmlns:a16="http://schemas.microsoft.com/office/drawing/2014/main" id="{F849B380-DA50-41AB-95DE-1A0813F7E08B}"/>
               </a:ext>
             </a:extLst>
           </p:cNvPr>
@@ -11256,7 +11264,7 @@
           <p:cNvPr id="7" name="">
             <a:extLst xmlns:a="http://schemas.openxmlformats.org/drawingml/2006/main">
               <a:ext uri="{FF2B5EF4-FFF2-40B4-BE49-F238E27FC236}">
-                <a16:creationId xmlns:a16="http://schemas.microsoft.com/office/drawing/2014/main" id="{7EBD6DC0-787B-484C-A7F0-D83C34D703BE}"/>
+                <a16:creationId xmlns:a16="http://schemas.microsoft.com/office/drawing/2014/main" id="{0EF2D18C-5DC2-4D7F-B50A-3EC7F3B0B869}"/>
               </a:ext>
             </a:extLst>
           </p:cNvPr>
@@ -11288,7 +11296,7 @@
           <p:cNvPr id="8" name="">
             <a:extLst xmlns:a="http://schemas.openxmlformats.org/drawingml/2006/main">
               <a:ext uri="{FF2B5EF4-FFF2-40B4-BE49-F238E27FC236}">
-                <a16:creationId xmlns:a16="http://schemas.microsoft.com/office/drawing/2014/main" id="{572D8C02-534A-4B13-8FAF-EB6D9F84B352}"/>
+                <a16:creationId xmlns:a16="http://schemas.microsoft.com/office/drawing/2014/main" id="{1BCE3F72-4C9F-494A-8CDA-45FB05CD02A6}"/>
               </a:ext>
             </a:extLst>
           </p:cNvPr>
@@ -11345,7 +11353,7 @@
           <p:cNvPr id="9" name="">
             <a:extLst xmlns:a="http://schemas.openxmlformats.org/drawingml/2006/main">
               <a:ext uri="{FF2B5EF4-FFF2-40B4-BE49-F238E27FC236}">
-                <a16:creationId xmlns:a16="http://schemas.microsoft.com/office/drawing/2014/main" id="{DAAD8F49-536F-456E-B052-D2F9B04A7D54}"/>
+                <a16:creationId xmlns:a16="http://schemas.microsoft.com/office/drawing/2014/main" id="{719C1927-74A4-42BA-BE83-6BCF30AAAD31}"/>
               </a:ext>
             </a:extLst>
           </p:cNvPr>
@@ -11406,7 +11414,7 @@
           <p:nvPr/>
         </p:nvPicPr>
         <p:blipFill>
-          <a:blip xmlns:r="http://schemas.openxmlformats.org/officeDocument/2006/relationships" xmlns:a="http://schemas.openxmlformats.org/drawingml/2006/main" r:embed="R4ba8a84221a840e9"/>
+          <a:blip xmlns:r="http://schemas.openxmlformats.org/officeDocument/2006/relationships" xmlns:a="http://schemas.openxmlformats.org/drawingml/2006/main" r:embed="R11d0c4c05e7d4ce0"/>
           <a:stretch xmlns:a="http://schemas.openxmlformats.org/drawingml/2006/main"/>
         </p:blipFill>
         <p:spPr>
@@ -11424,7 +11432,7 @@
           <p:cNvPr id="11" name="">
             <a:extLst xmlns:a="http://schemas.openxmlformats.org/drawingml/2006/main">
               <a:ext uri="{FF2B5EF4-FFF2-40B4-BE49-F238E27FC236}">
-                <a16:creationId xmlns:a16="http://schemas.microsoft.com/office/drawing/2014/main" id="{1A911E76-6905-4EE8-A1C9-CDC970FBC0FC}"/>
+                <a16:creationId xmlns:a16="http://schemas.microsoft.com/office/drawing/2014/main" id="{C03C05AE-E4CF-48DC-9E10-3E3202D0934E}"/>
               </a:ext>
             </a:extLst>
           </p:cNvPr>
@@ -11481,7 +11489,7 @@
           <p:cNvPr id="12" name="">
             <a:extLst xmlns:a="http://schemas.openxmlformats.org/drawingml/2006/main">
               <a:ext uri="{FF2B5EF4-FFF2-40B4-BE49-F238E27FC236}">
-                <a16:creationId xmlns:a16="http://schemas.microsoft.com/office/drawing/2014/main" id="{F6CA7F77-45BA-4252-851B-E577FF483D56}"/>
+                <a16:creationId xmlns:a16="http://schemas.microsoft.com/office/drawing/2014/main" id="{333DF178-B2EE-4C2B-B212-837A2D4814AC}"/>
               </a:ext>
             </a:extLst>
           </p:cNvPr>
@@ -11538,7 +11546,7 @@
           <p:cNvPr id="13" name="">
             <a:extLst xmlns:a="http://schemas.openxmlformats.org/drawingml/2006/main">
               <a:ext uri="{FF2B5EF4-FFF2-40B4-BE49-F238E27FC236}">
-                <a16:creationId xmlns:a16="http://schemas.microsoft.com/office/drawing/2014/main" id="{D8D3E602-F9F6-42BC-88D9-892BD3D194CB}"/>
+                <a16:creationId xmlns:a16="http://schemas.microsoft.com/office/drawing/2014/main" id="{1392989D-1A75-4A0C-A5D1-C60CAE5B658D}"/>
               </a:ext>
             </a:extLst>
           </p:cNvPr>
@@ -11570,7 +11578,7 @@
           <p:cNvPr id="14" name="">
             <a:extLst xmlns:a="http://schemas.openxmlformats.org/drawingml/2006/main">
               <a:ext uri="{FF2B5EF4-FFF2-40B4-BE49-F238E27FC236}">
-                <a16:creationId xmlns:a16="http://schemas.microsoft.com/office/drawing/2014/main" id="{C2FF4146-B23A-4C0B-9C4E-81B5FD65D2F0}"/>
+                <a16:creationId xmlns:a16="http://schemas.microsoft.com/office/drawing/2014/main" id="{65935493-8642-4955-8E20-859263437D5E}"/>
               </a:ext>
             </a:extLst>
           </p:cNvPr>
@@ -11627,7 +11635,7 @@
           <p:cNvPr id="15" name="">
             <a:extLst xmlns:a="http://schemas.openxmlformats.org/drawingml/2006/main">
               <a:ext uri="{FF2B5EF4-FFF2-40B4-BE49-F238E27FC236}">
-                <a16:creationId xmlns:a16="http://schemas.microsoft.com/office/drawing/2014/main" id="{D0DD6F7C-2099-4FF9-9933-BA4602B1C388}"/>
+                <a16:creationId xmlns:a16="http://schemas.microsoft.com/office/drawing/2014/main" id="{A36BC825-9A41-4519-8D7D-E1F41A3B1B05}"/>
               </a:ext>
             </a:extLst>
           </p:cNvPr>
@@ -11682,7 +11690,7 @@
     </p:spTree>
     <p:extLst>
       <p:ext uri="{BB962C8B-B14F-4D97-AF65-F5344CB8AC3E}">
-        <p14:creationId xmlns:p14="http://schemas.microsoft.com/office/powerpoint/2010/main" val="1553010599"/>
+        <p14:creationId xmlns:p14="http://schemas.microsoft.com/office/powerpoint/2010/main" val="1123672459"/>
       </p:ext>
     </p:extLst>
   </p:cSld>
@@ -11837,7 +11845,7 @@
           <p:cNvPr id="23" name="">
             <a:extLst xmlns:a="http://schemas.openxmlformats.org/drawingml/2006/main">
               <a:ext uri="{FF2B5EF4-FFF2-40B4-BE49-F238E27FC236}">
-                <a16:creationId xmlns:a16="http://schemas.microsoft.com/office/drawing/2014/main" id="{C081D3E9-EAC2-467E-AEEF-0ACBF9C6D5C2}"/>
+                <a16:creationId xmlns:a16="http://schemas.microsoft.com/office/drawing/2014/main" id="{6F5FA7A0-B9A7-4AA1-800C-84D9B2995C26}"/>
               </a:ext>
             </a:extLst>
           </p:cNvPr>
@@ -11869,7 +11877,7 @@
           <p:cNvPr id="2" name="">
             <a:extLst xmlns:a="http://schemas.openxmlformats.org/drawingml/2006/main">
               <a:ext uri="{FF2B5EF4-FFF2-40B4-BE49-F238E27FC236}">
-                <a16:creationId xmlns:a16="http://schemas.microsoft.com/office/drawing/2014/main" id="{DC55E37F-AB33-473E-A67E-0509BEBB259C}"/>
+                <a16:creationId xmlns:a16="http://schemas.microsoft.com/office/drawing/2014/main" id="{66FF24AC-E198-438F-86D0-26FCB757E59F}"/>
               </a:ext>
             </a:extLst>
           </p:cNvPr>
@@ -11926,7 +11934,7 @@
           <p:cNvPr id="3" name="">
             <a:extLst xmlns:a="http://schemas.openxmlformats.org/drawingml/2006/main">
               <a:ext uri="{FF2B5EF4-FFF2-40B4-BE49-F238E27FC236}">
-                <a16:creationId xmlns:a16="http://schemas.microsoft.com/office/drawing/2014/main" id="{85B4D62F-51E8-48CE-955A-E9960CC9F931}"/>
+                <a16:creationId xmlns:a16="http://schemas.microsoft.com/office/drawing/2014/main" id="{A2C926CB-CAEB-45A3-905F-91564A4F46B9}"/>
               </a:ext>
             </a:extLst>
           </p:cNvPr>
@@ -11958,7 +11966,7 @@
           <p:cNvPr id="4" name="">
             <a:extLst xmlns:a="http://schemas.openxmlformats.org/drawingml/2006/main">
               <a:ext uri="{FF2B5EF4-FFF2-40B4-BE49-F238E27FC236}">
-                <a16:creationId xmlns:a16="http://schemas.microsoft.com/office/drawing/2014/main" id="{74E2DCE5-7205-43DF-BEC5-32060457B55E}"/>
+                <a16:creationId xmlns:a16="http://schemas.microsoft.com/office/drawing/2014/main" id="{51C60174-64ED-4F21-81A1-678DF8FE7398}"/>
               </a:ext>
             </a:extLst>
           </p:cNvPr>
@@ -12015,7 +12023,7 @@
           <p:cNvPr id="5" name="">
             <a:extLst xmlns:a="http://schemas.openxmlformats.org/drawingml/2006/main">
               <a:ext uri="{FF2B5EF4-FFF2-40B4-BE49-F238E27FC236}">
-                <a16:creationId xmlns:a16="http://schemas.microsoft.com/office/drawing/2014/main" id="{59A9649A-2F66-4510-A825-979387DF0525}"/>
+                <a16:creationId xmlns:a16="http://schemas.microsoft.com/office/drawing/2014/main" id="{31567236-468D-4E0E-A91B-3CCC6E3762BE}"/>
               </a:ext>
             </a:extLst>
           </p:cNvPr>
@@ -12072,7 +12080,7 @@
           <p:cNvPr id="6" name="">
             <a:extLst xmlns:a="http://schemas.openxmlformats.org/drawingml/2006/main">
               <a:ext uri="{FF2B5EF4-FFF2-40B4-BE49-F238E27FC236}">
-                <a16:creationId xmlns:a16="http://schemas.microsoft.com/office/drawing/2014/main" id="{676E2BC7-0AF0-4D3C-AA1E-722FBB934EDC}"/>
+                <a16:creationId xmlns:a16="http://schemas.microsoft.com/office/drawing/2014/main" id="{5F2BCC3E-E147-4FB1-A44B-8D262FBADA77}"/>
               </a:ext>
             </a:extLst>
           </p:cNvPr>
@@ -12129,7 +12137,7 @@
           <p:cNvPr id="7" name="">
             <a:extLst xmlns:a="http://schemas.openxmlformats.org/drawingml/2006/main">
               <a:ext uri="{FF2B5EF4-FFF2-40B4-BE49-F238E27FC236}">
-                <a16:creationId xmlns:a16="http://schemas.microsoft.com/office/drawing/2014/main" id="{8496001F-130C-4C85-8927-B05027296910}"/>
+                <a16:creationId xmlns:a16="http://schemas.microsoft.com/office/drawing/2014/main" id="{65432566-B600-4643-A3B2-F43B975B5ED3}"/>
               </a:ext>
             </a:extLst>
           </p:cNvPr>
@@ -12161,7 +12169,7 @@
           <p:cNvPr id="8" name="">
             <a:extLst xmlns:a="http://schemas.openxmlformats.org/drawingml/2006/main">
               <a:ext uri="{FF2B5EF4-FFF2-40B4-BE49-F238E27FC236}">
-                <a16:creationId xmlns:a16="http://schemas.microsoft.com/office/drawing/2014/main" id="{A42A79B1-D2CA-4DD8-9BDB-A8660147A89B}"/>
+                <a16:creationId xmlns:a16="http://schemas.microsoft.com/office/drawing/2014/main" id="{89B2D235-95C2-4CB4-8C27-5D5F173D8F0D}"/>
               </a:ext>
             </a:extLst>
           </p:cNvPr>
@@ -12218,7 +12226,7 @@
           <p:cNvPr id="9" name="">
             <a:extLst xmlns:a="http://schemas.openxmlformats.org/drawingml/2006/main">
               <a:ext uri="{FF2B5EF4-FFF2-40B4-BE49-F238E27FC236}">
-                <a16:creationId xmlns:a16="http://schemas.microsoft.com/office/drawing/2014/main" id="{43F86D71-E403-4E57-B325-784367EA1AA4}"/>
+                <a16:creationId xmlns:a16="http://schemas.microsoft.com/office/drawing/2014/main" id="{9D685748-0987-4B77-B616-0907E7D55B6E}"/>
               </a:ext>
             </a:extLst>
           </p:cNvPr>
@@ -12275,7 +12283,7 @@
           <p:cNvPr id="10" name="">
             <a:extLst xmlns:a="http://schemas.openxmlformats.org/drawingml/2006/main">
               <a:ext uri="{FF2B5EF4-FFF2-40B4-BE49-F238E27FC236}">
-                <a16:creationId xmlns:a16="http://schemas.microsoft.com/office/drawing/2014/main" id="{D86904B2-D1B0-413A-9C9C-3B5066EAA8D9}"/>
+                <a16:creationId xmlns:a16="http://schemas.microsoft.com/office/drawing/2014/main" id="{F730AE2E-CFC5-4FCE-82AA-6F579D307F5F}"/>
               </a:ext>
             </a:extLst>
           </p:cNvPr>
@@ -12309,7 +12317,7 @@
           <p:cNvPr id="11" name="">
             <a:extLst xmlns:a="http://schemas.openxmlformats.org/drawingml/2006/main">
               <a:ext uri="{FF2B5EF4-FFF2-40B4-BE49-F238E27FC236}">
-                <a16:creationId xmlns:a16="http://schemas.microsoft.com/office/drawing/2014/main" id="{D44A9040-C3A6-4344-A598-602D6C77B2CE}"/>
+                <a16:creationId xmlns:a16="http://schemas.microsoft.com/office/drawing/2014/main" id="{4595B7D8-54FC-4F14-A3C3-193BA8E46712}"/>
               </a:ext>
             </a:extLst>
           </p:cNvPr>
@@ -12341,7 +12349,7 @@
           <p:cNvPr id="12" name="">
             <a:extLst xmlns:a="http://schemas.openxmlformats.org/drawingml/2006/main">
               <a:ext uri="{FF2B5EF4-FFF2-40B4-BE49-F238E27FC236}">
-                <a16:creationId xmlns:a16="http://schemas.microsoft.com/office/drawing/2014/main" id="{04CD8446-FBCC-4E5B-8F7F-F641C14F8DD5}"/>
+                <a16:creationId xmlns:a16="http://schemas.microsoft.com/office/drawing/2014/main" id="{78B28314-2566-4B51-96EC-5AB9D32A3F0B}"/>
               </a:ext>
             </a:extLst>
           </p:cNvPr>
@@ -12398,7 +12406,7 @@
           <p:cNvPr id="13" name="">
             <a:extLst xmlns:a="http://schemas.openxmlformats.org/drawingml/2006/main">
               <a:ext uri="{FF2B5EF4-FFF2-40B4-BE49-F238E27FC236}">
-                <a16:creationId xmlns:a16="http://schemas.microsoft.com/office/drawing/2014/main" id="{193BB383-824C-4C00-AD73-197BA058F0CE}"/>
+                <a16:creationId xmlns:a16="http://schemas.microsoft.com/office/drawing/2014/main" id="{2817C8EE-11D2-4FF6-9D08-77EE48B9AFD5}"/>
               </a:ext>
             </a:extLst>
           </p:cNvPr>
@@ -12455,7 +12463,7 @@
           <p:cNvPr id="14" name="">
             <a:extLst xmlns:a="http://schemas.openxmlformats.org/drawingml/2006/main">
               <a:ext uri="{FF2B5EF4-FFF2-40B4-BE49-F238E27FC236}">
-                <a16:creationId xmlns:a16="http://schemas.microsoft.com/office/drawing/2014/main" id="{22EAB5C1-540C-4038-8C71-92DC409BEB52}"/>
+                <a16:creationId xmlns:a16="http://schemas.microsoft.com/office/drawing/2014/main" id="{0E612D0E-AFD6-4649-9536-D5E708744D45}"/>
               </a:ext>
             </a:extLst>
           </p:cNvPr>
@@ -12489,7 +12497,7 @@
           <p:cNvPr id="15" name="">
             <a:extLst xmlns:a="http://schemas.openxmlformats.org/drawingml/2006/main">
               <a:ext uri="{FF2B5EF4-FFF2-40B4-BE49-F238E27FC236}">
-                <a16:creationId xmlns:a16="http://schemas.microsoft.com/office/drawing/2014/main" id="{A2F9AE37-CA6C-4332-BFDB-5D1ED54AB2BC}"/>
+                <a16:creationId xmlns:a16="http://schemas.microsoft.com/office/drawing/2014/main" id="{6EB61647-7092-4A91-BE4D-B23829A4F96A}"/>
               </a:ext>
             </a:extLst>
           </p:cNvPr>
@@ -12521,7 +12529,7 @@
           <p:cNvPr id="16" name="">
             <a:extLst xmlns:a="http://schemas.openxmlformats.org/drawingml/2006/main">
               <a:ext uri="{FF2B5EF4-FFF2-40B4-BE49-F238E27FC236}">
-                <a16:creationId xmlns:a16="http://schemas.microsoft.com/office/drawing/2014/main" id="{1025BFE1-51F2-46B4-AB41-42BE14F587FA}"/>
+                <a16:creationId xmlns:a16="http://schemas.microsoft.com/office/drawing/2014/main" id="{089E1990-1EA4-4452-BE62-71C9921FBF45}"/>
               </a:ext>
             </a:extLst>
           </p:cNvPr>
@@ -12578,7 +12586,7 @@
           <p:cNvPr id="17" name="">
             <a:extLst xmlns:a="http://schemas.openxmlformats.org/drawingml/2006/main">
               <a:ext uri="{FF2B5EF4-FFF2-40B4-BE49-F238E27FC236}">
-                <a16:creationId xmlns:a16="http://schemas.microsoft.com/office/drawing/2014/main" id="{008EA1BF-1DD3-4B38-87AD-3DECEAE0A794}"/>
+                <a16:creationId xmlns:a16="http://schemas.microsoft.com/office/drawing/2014/main" id="{F2E49D58-3E15-41C0-8ACC-3C2762A734CE}"/>
               </a:ext>
             </a:extLst>
           </p:cNvPr>
@@ -12635,7 +12643,7 @@
           <p:cNvPr id="18" name="">
             <a:extLst xmlns:a="http://schemas.openxmlformats.org/drawingml/2006/main">
               <a:ext uri="{FF2B5EF4-FFF2-40B4-BE49-F238E27FC236}">
-                <a16:creationId xmlns:a16="http://schemas.microsoft.com/office/drawing/2014/main" id="{BB006DA2-6CC0-445A-A0AB-EF5E346AFF5A}"/>
+                <a16:creationId xmlns:a16="http://schemas.microsoft.com/office/drawing/2014/main" id="{2A3D0549-D98C-4BF2-95C1-A29816DE3961}"/>
               </a:ext>
             </a:extLst>
           </p:cNvPr>
@@ -12669,7 +12677,7 @@
           <p:cNvPr id="19" name="">
             <a:extLst xmlns:a="http://schemas.openxmlformats.org/drawingml/2006/main">
               <a:ext uri="{FF2B5EF4-FFF2-40B4-BE49-F238E27FC236}">
-                <a16:creationId xmlns:a16="http://schemas.microsoft.com/office/drawing/2014/main" id="{01143A34-98DE-4361-ABDA-2C5AF0F33256}"/>
+                <a16:creationId xmlns:a16="http://schemas.microsoft.com/office/drawing/2014/main" id="{03E4BA1F-B847-4A78-A079-F049945C10D8}"/>
               </a:ext>
             </a:extLst>
           </p:cNvPr>
@@ -12701,7 +12709,7 @@
           <p:cNvPr id="20" name="">
             <a:extLst xmlns:a="http://schemas.openxmlformats.org/drawingml/2006/main">
               <a:ext uri="{FF2B5EF4-FFF2-40B4-BE49-F238E27FC236}">
-                <a16:creationId xmlns:a16="http://schemas.microsoft.com/office/drawing/2014/main" id="{D7A7C45A-6092-4AD2-AFF9-C6A2E944F9A7}"/>
+                <a16:creationId xmlns:a16="http://schemas.microsoft.com/office/drawing/2014/main" id="{888A3266-D573-43EA-AE47-7556B68F1A16}"/>
               </a:ext>
             </a:extLst>
           </p:cNvPr>
@@ -12758,7 +12766,7 @@
           <p:cNvPr id="21" name="">
             <a:extLst xmlns:a="http://schemas.openxmlformats.org/drawingml/2006/main">
               <a:ext uri="{FF2B5EF4-FFF2-40B4-BE49-F238E27FC236}">
-                <a16:creationId xmlns:a16="http://schemas.microsoft.com/office/drawing/2014/main" id="{1402C99C-AAC0-4DE9-A837-5D01DFFD9CBF}"/>
+                <a16:creationId xmlns:a16="http://schemas.microsoft.com/office/drawing/2014/main" id="{6426511A-899B-4EA9-96F7-721680397F6B}"/>
               </a:ext>
             </a:extLst>
           </p:cNvPr>
@@ -12805,7 +12813,7 @@
                 <a:ea typeface="Arial"/>
                 <a:cs typeface="Arial"/>
               </a:rPr>
-              <a:t>Compare with the answer: 244.8.</a:t>
+              <a:t>Compare with the answer: 220.8.</a:t>
             </a:r>
           </a:p>
         </p:txBody>
@@ -12815,7 +12823,7 @@
           <p:cNvPr id="22" name="">
             <a:extLst xmlns:a="http://schemas.openxmlformats.org/drawingml/2006/main">
               <a:ext uri="{FF2B5EF4-FFF2-40B4-BE49-F238E27FC236}">
-                <a16:creationId xmlns:a16="http://schemas.microsoft.com/office/drawing/2014/main" id="{4551AC7F-B5C1-42DD-A1E9-87BE569E8086}"/>
+                <a16:creationId xmlns:a16="http://schemas.microsoft.com/office/drawing/2014/main" id="{0E776CCF-F7B8-4BF9-911A-E44BA137274C}"/>
               </a:ext>
             </a:extLst>
           </p:cNvPr>
@@ -12870,7 +12878,7 @@
     </p:spTree>
     <p:extLst>
       <p:ext uri="{BB962C8B-B14F-4D97-AF65-F5344CB8AC3E}">
-        <p14:creationId xmlns:p14="http://schemas.microsoft.com/office/powerpoint/2010/main" val="1421319245"/>
+        <p14:creationId xmlns:p14="http://schemas.microsoft.com/office/powerpoint/2010/main" val="1929945981"/>
       </p:ext>
     </p:extLst>
   </p:cSld>
@@ -13071,7 +13079,7 @@
           <p:cNvPr id="22" name="">
             <a:extLst xmlns:a="http://schemas.openxmlformats.org/drawingml/2006/main">
               <a:ext uri="{FF2B5EF4-FFF2-40B4-BE49-F238E27FC236}">
-                <a16:creationId xmlns:a16="http://schemas.microsoft.com/office/drawing/2014/main" id="{1A5870A1-D999-41CD-86D7-B1A80F8FF510}"/>
+                <a16:creationId xmlns:a16="http://schemas.microsoft.com/office/drawing/2014/main" id="{B9EB86D9-87C3-48E6-87B0-70CD0FBAD64A}"/>
               </a:ext>
             </a:extLst>
           </p:cNvPr>
@@ -13103,7 +13111,7 @@
           <p:cNvPr id="2" name="">
             <a:extLst xmlns:a="http://schemas.openxmlformats.org/drawingml/2006/main">
               <a:ext uri="{FF2B5EF4-FFF2-40B4-BE49-F238E27FC236}">
-                <a16:creationId xmlns:a16="http://schemas.microsoft.com/office/drawing/2014/main" id="{AB941A92-2FE1-4797-A4AA-6FCBA95084DB}"/>
+                <a16:creationId xmlns:a16="http://schemas.microsoft.com/office/drawing/2014/main" id="{8A52770F-BE27-422A-A925-51700036B4D2}"/>
               </a:ext>
             </a:extLst>
           </p:cNvPr>
@@ -13160,7 +13168,7 @@
           <p:cNvPr id="3" name="">
             <a:extLst xmlns:a="http://schemas.openxmlformats.org/drawingml/2006/main">
               <a:ext uri="{FF2B5EF4-FFF2-40B4-BE49-F238E27FC236}">
-                <a16:creationId xmlns:a16="http://schemas.microsoft.com/office/drawing/2014/main" id="{D1C38061-977A-45CA-8947-1BC34862934B}"/>
+                <a16:creationId xmlns:a16="http://schemas.microsoft.com/office/drawing/2014/main" id="{D3CFD445-1BF5-4D9D-BC40-E5E7FCEA2299}"/>
               </a:ext>
             </a:extLst>
           </p:cNvPr>
@@ -13192,7 +13200,7 @@
           <p:cNvPr id="4" name="">
             <a:extLst xmlns:a="http://schemas.openxmlformats.org/drawingml/2006/main">
               <a:ext uri="{FF2B5EF4-FFF2-40B4-BE49-F238E27FC236}">
-                <a16:creationId xmlns:a16="http://schemas.microsoft.com/office/drawing/2014/main" id="{D27A2571-CA47-45FF-A5D4-B9BE437DAC44}"/>
+                <a16:creationId xmlns:a16="http://schemas.microsoft.com/office/drawing/2014/main" id="{B88F0971-F564-43DB-885B-9DEEA37C38A3}"/>
               </a:ext>
             </a:extLst>
           </p:cNvPr>
@@ -13249,7 +13257,7 @@
           <p:cNvPr id="5" name="">
             <a:extLst xmlns:a="http://schemas.openxmlformats.org/drawingml/2006/main">
               <a:ext uri="{FF2B5EF4-FFF2-40B4-BE49-F238E27FC236}">
-                <a16:creationId xmlns:a16="http://schemas.microsoft.com/office/drawing/2014/main" id="{5CF48652-D102-473B-AD1D-21340FF0F503}"/>
+                <a16:creationId xmlns:a16="http://schemas.microsoft.com/office/drawing/2014/main" id="{A68521FA-3173-4F6B-8BBC-81473851B3A0}"/>
               </a:ext>
             </a:extLst>
           </p:cNvPr>
@@ -13306,7 +13314,7 @@
           <p:cNvPr id="6" name="">
             <a:extLst xmlns:a="http://schemas.openxmlformats.org/drawingml/2006/main">
               <a:ext uri="{FF2B5EF4-FFF2-40B4-BE49-F238E27FC236}">
-                <a16:creationId xmlns:a16="http://schemas.microsoft.com/office/drawing/2014/main" id="{48BBC5D3-96DE-4E79-86DE-2D43831BBEDF}"/>
+                <a16:creationId xmlns:a16="http://schemas.microsoft.com/office/drawing/2014/main" id="{1917A714-C3BE-46A1-869F-DEA6A613DC3C}"/>
               </a:ext>
             </a:extLst>
           </p:cNvPr>
@@ -13363,7 +13371,7 @@
           <p:cNvPr id="7" name="">
             <a:extLst xmlns:a="http://schemas.openxmlformats.org/drawingml/2006/main">
               <a:ext uri="{FF2B5EF4-FFF2-40B4-BE49-F238E27FC236}">
-                <a16:creationId xmlns:a16="http://schemas.microsoft.com/office/drawing/2014/main" id="{E6C35C75-CCAE-4A4C-85C8-868234839600}"/>
+                <a16:creationId xmlns:a16="http://schemas.microsoft.com/office/drawing/2014/main" id="{F73889DA-BC94-413E-8A5C-8D71707D3D56}"/>
               </a:ext>
             </a:extLst>
           </p:cNvPr>
@@ -13395,7 +13403,7 @@
           <p:cNvPr id="8" name="">
             <a:extLst xmlns:a="http://schemas.openxmlformats.org/drawingml/2006/main">
               <a:ext uri="{FF2B5EF4-FFF2-40B4-BE49-F238E27FC236}">
-                <a16:creationId xmlns:a16="http://schemas.microsoft.com/office/drawing/2014/main" id="{DBDC589B-3AE6-48F1-8900-2EB04E45B00E}"/>
+                <a16:creationId xmlns:a16="http://schemas.microsoft.com/office/drawing/2014/main" id="{AFCC2855-48FC-4A67-B55C-F50B827072CE}"/>
               </a:ext>
             </a:extLst>
           </p:cNvPr>
@@ -13452,7 +13460,7 @@
           <p:cNvPr id="9" name="">
             <a:extLst xmlns:a="http://schemas.openxmlformats.org/drawingml/2006/main">
               <a:ext uri="{FF2B5EF4-FFF2-40B4-BE49-F238E27FC236}">
-                <a16:creationId xmlns:a16="http://schemas.microsoft.com/office/drawing/2014/main" id="{0483243A-A43A-4BC2-9417-1D47EB2108A2}"/>
+                <a16:creationId xmlns:a16="http://schemas.microsoft.com/office/drawing/2014/main" id="{17FF12D3-B175-406E-9F4A-51DBE42C370A}"/>
               </a:ext>
             </a:extLst>
           </p:cNvPr>
@@ -13509,7 +13517,7 @@
           <p:cNvPr id="10" name="">
             <a:extLst xmlns:a="http://schemas.openxmlformats.org/drawingml/2006/main">
               <a:ext uri="{FF2B5EF4-FFF2-40B4-BE49-F238E27FC236}">
-                <a16:creationId xmlns:a16="http://schemas.microsoft.com/office/drawing/2014/main" id="{319FDE69-BF41-434E-9D03-E05C607ED7EC}"/>
+                <a16:creationId xmlns:a16="http://schemas.microsoft.com/office/drawing/2014/main" id="{6BD82A2D-112B-41DB-B953-6D7DBABE3F13}"/>
               </a:ext>
             </a:extLst>
           </p:cNvPr>
@@ -13543,7 +13551,7 @@
           <p:cNvPr id="11" name="">
             <a:extLst xmlns:a="http://schemas.openxmlformats.org/drawingml/2006/main">
               <a:ext uri="{FF2B5EF4-FFF2-40B4-BE49-F238E27FC236}">
-                <a16:creationId xmlns:a16="http://schemas.microsoft.com/office/drawing/2014/main" id="{C3E65389-DFC5-4EA8-A791-79138F56D651}"/>
+                <a16:creationId xmlns:a16="http://schemas.microsoft.com/office/drawing/2014/main" id="{0A15837E-8780-4B09-B235-2C632DA6E8D4}"/>
               </a:ext>
             </a:extLst>
           </p:cNvPr>
@@ -13575,7 +13583,7 @@
           <p:cNvPr id="12" name="">
             <a:extLst xmlns:a="http://schemas.openxmlformats.org/drawingml/2006/main">
               <a:ext uri="{FF2B5EF4-FFF2-40B4-BE49-F238E27FC236}">
-                <a16:creationId xmlns:a16="http://schemas.microsoft.com/office/drawing/2014/main" id="{3218A528-96C2-4986-8268-F26BBF0088E0}"/>
+                <a16:creationId xmlns:a16="http://schemas.microsoft.com/office/drawing/2014/main" id="{DF25FBDA-222C-4124-B726-96422EA955EB}"/>
               </a:ext>
             </a:extLst>
           </p:cNvPr>
@@ -13632,7 +13640,7 @@
           <p:cNvPr id="13" name="">
             <a:extLst xmlns:a="http://schemas.openxmlformats.org/drawingml/2006/main">
               <a:ext uri="{FF2B5EF4-FFF2-40B4-BE49-F238E27FC236}">
-                <a16:creationId xmlns:a16="http://schemas.microsoft.com/office/drawing/2014/main" id="{42041E14-1FE8-48F5-A983-164595071DFB}"/>
+                <a16:creationId xmlns:a16="http://schemas.microsoft.com/office/drawing/2014/main" id="{060979A7-02BC-4F13-AA03-2F068327C659}"/>
               </a:ext>
             </a:extLst>
           </p:cNvPr>
@@ -13689,7 +13697,7 @@
           <p:cNvPr id="14" name="">
             <a:extLst xmlns:a="http://schemas.openxmlformats.org/drawingml/2006/main">
               <a:ext uri="{FF2B5EF4-FFF2-40B4-BE49-F238E27FC236}">
-                <a16:creationId xmlns:a16="http://schemas.microsoft.com/office/drawing/2014/main" id="{83920CE2-8F04-4B7C-B432-86AC8BABF6D6}"/>
+                <a16:creationId xmlns:a16="http://schemas.microsoft.com/office/drawing/2014/main" id="{09B76253-42C6-42C6-AB86-153B7CE3FF89}"/>
               </a:ext>
             </a:extLst>
           </p:cNvPr>
@@ -13723,7 +13731,7 @@
           <p:cNvPr id="15" name="">
             <a:extLst xmlns:a="http://schemas.openxmlformats.org/drawingml/2006/main">
               <a:ext uri="{FF2B5EF4-FFF2-40B4-BE49-F238E27FC236}">
-                <a16:creationId xmlns:a16="http://schemas.microsoft.com/office/drawing/2014/main" id="{89639AF3-EA85-46A4-B50E-702D8B3F5B66}"/>
+                <a16:creationId xmlns:a16="http://schemas.microsoft.com/office/drawing/2014/main" id="{179D944B-455C-4E65-9ADC-4B4C69C679D9}"/>
               </a:ext>
             </a:extLst>
           </p:cNvPr>
@@ -13755,7 +13763,7 @@
           <p:cNvPr id="16" name="">
             <a:extLst xmlns:a="http://schemas.openxmlformats.org/drawingml/2006/main">
               <a:ext uri="{FF2B5EF4-FFF2-40B4-BE49-F238E27FC236}">
-                <a16:creationId xmlns:a16="http://schemas.microsoft.com/office/drawing/2014/main" id="{1F041AA7-1555-4026-A496-193F30DA67CA}"/>
+                <a16:creationId xmlns:a16="http://schemas.microsoft.com/office/drawing/2014/main" id="{8572B44C-E022-4C6A-9692-7132A0FE2A52}"/>
               </a:ext>
             </a:extLst>
           </p:cNvPr>
@@ -13812,7 +13820,7 @@
           <p:cNvPr id="17" name="">
             <a:extLst xmlns:a="http://schemas.openxmlformats.org/drawingml/2006/main">
               <a:ext uri="{FF2B5EF4-FFF2-40B4-BE49-F238E27FC236}">
-                <a16:creationId xmlns:a16="http://schemas.microsoft.com/office/drawing/2014/main" id="{4EA76A6B-D98E-40DC-AE0F-F66756B3039B}"/>
+                <a16:creationId xmlns:a16="http://schemas.microsoft.com/office/drawing/2014/main" id="{348A6108-1505-44B9-9141-D00E647B932E}"/>
               </a:ext>
             </a:extLst>
           </p:cNvPr>
@@ -13869,7 +13877,7 @@
           <p:cNvPr id="18" name="">
             <a:extLst xmlns:a="http://schemas.openxmlformats.org/drawingml/2006/main">
               <a:ext uri="{FF2B5EF4-FFF2-40B4-BE49-F238E27FC236}">
-                <a16:creationId xmlns:a16="http://schemas.microsoft.com/office/drawing/2014/main" id="{282721A3-457D-4055-8B08-4AC0F2E85BB8}"/>
+                <a16:creationId xmlns:a16="http://schemas.microsoft.com/office/drawing/2014/main" id="{B9A8E46C-7743-4BE3-9888-9A030BE15D7A}"/>
               </a:ext>
             </a:extLst>
           </p:cNvPr>
@@ -13903,7 +13911,7 @@
           <p:cNvPr id="19" name="">
             <a:extLst xmlns:a="http://schemas.openxmlformats.org/drawingml/2006/main">
               <a:ext uri="{FF2B5EF4-FFF2-40B4-BE49-F238E27FC236}">
-                <a16:creationId xmlns:a16="http://schemas.microsoft.com/office/drawing/2014/main" id="{9DC18F67-D898-4336-BA7E-C7094A3868E4}"/>
+                <a16:creationId xmlns:a16="http://schemas.microsoft.com/office/drawing/2014/main" id="{288A9A6E-6C86-4441-95F4-62DE76B64DED}"/>
               </a:ext>
             </a:extLst>
           </p:cNvPr>
@@ -13935,7 +13943,7 @@
           <p:cNvPr id="20" name="">
             <a:extLst xmlns:a="http://schemas.openxmlformats.org/drawingml/2006/main">
               <a:ext uri="{FF2B5EF4-FFF2-40B4-BE49-F238E27FC236}">
-                <a16:creationId xmlns:a16="http://schemas.microsoft.com/office/drawing/2014/main" id="{55F0A684-B506-4896-98C1-07C93CCBE2D9}"/>
+                <a16:creationId xmlns:a16="http://schemas.microsoft.com/office/drawing/2014/main" id="{9FADFDB5-9F6B-4A46-A514-03E7840C2CE4}"/>
               </a:ext>
             </a:extLst>
           </p:cNvPr>
@@ -13992,7 +14000,7 @@
           <p:cNvPr id="21" name="">
             <a:extLst xmlns:a="http://schemas.openxmlformats.org/drawingml/2006/main">
               <a:ext uri="{FF2B5EF4-FFF2-40B4-BE49-F238E27FC236}">
-                <a16:creationId xmlns:a16="http://schemas.microsoft.com/office/drawing/2014/main" id="{A9902870-435B-44B1-958B-723F0813C2B8}"/>
+                <a16:creationId xmlns:a16="http://schemas.microsoft.com/office/drawing/2014/main" id="{9A01EAB3-24CE-4D67-8D19-1703C9BAAAA3}"/>
               </a:ext>
             </a:extLst>
           </p:cNvPr>
@@ -14047,7 +14055,7 @@
     </p:spTree>
     <p:extLst>
       <p:ext uri="{BB962C8B-B14F-4D97-AF65-F5344CB8AC3E}">
-        <p14:creationId xmlns:p14="http://schemas.microsoft.com/office/powerpoint/2010/main" val="1691806937"/>
+        <p14:creationId xmlns:p14="http://schemas.microsoft.com/office/powerpoint/2010/main" val="491235673"/>
       </p:ext>
     </p:extLst>
   </p:cSld>
